--- a/submission/LOCKSMITH_DEV/pitch/LOCKSMITH_DEV_presentation.pptx
+++ b/submission/LOCKSMITH_DEV/pitch/LOCKSMITH_DEV_presentation.pptx
@@ -3571,7 +3571,7 @@
               <a:defRPr sz="1800"/>
             </a:pPr>
             <a:r>
-              <a:t>Challenge 2 (de novo): RFantibody pilot run — 36 backbones, hotspot conditioning works (71.2% vs 50.1% interface on the PD-L1 footprint).</a:t>
+              <a:t>Challenge 2 (de novo): RFantibody + ProteinMPNN, 30 designs, folded with Boltz-2. ONE clears all seven gates — 96.0/100, ipSAE 0.864.</a:t>
             </a:r>
           </a:p>
           <a:p>
@@ -3579,7 +3579,15 @@
               <a:defRPr sz="1800"/>
             </a:pPr>
             <a:r>
-              <a:t>   No design submitted: nothing in the Ch2 rubric can detect a wrong pose, and Boltz-2 is at median DockQ 0.291 on novel pairs.</a:t>
+              <a:t>   Targeting is evidenced: 17/18 backbones beat a contiguous same-size patch null (0.712 vs 0.154). Binding is NOT evidenced by anything here.</a:t>
+            </a:r>
+          </a:p>
+          <a:p>
+            <a:pPr>
+              <a:defRPr sz="1800"/>
+            </a:pPr>
+            <a:r>
+              <a:t>   The other 29 fail ipSAE alone, all at &lt;=0.331. At recycling 3 we measured 0/30 — an under-sampling artefact we caught and withdrew.</a:t>
             </a:r>
           </a:p>
         </p:txBody>

--- a/submission/LOCKSMITH_DEV/pitch/LOCKSMITH_DEV_presentation.pptx
+++ b/submission/LOCKSMITH_DEV/pitch/LOCKSMITH_DEV_presentation.pptx
@@ -109,6 +109,258 @@
     </a:lvl9pPr>
   </p:defaultTextStyle>
 </p:presentation>
+</file>
+
+<file path=ppt/charts/chart1.xml><?xml version="1.0" encoding="utf-8"?>
+<c:chartSpace xmlns:c="http://schemas.openxmlformats.org/drawingml/2006/chart" xmlns:a="http://schemas.openxmlformats.org/drawingml/2006/main" xmlns:r="http://schemas.openxmlformats.org/officeDocument/2006/relationships">
+  <c:date1904 val="0"/>
+  <c:chart>
+    <c:autoTitleDeleted val="0"/>
+    <c:plotArea>
+      <c:lineChart>
+        <c:grouping val="standard"/>
+        <c:varyColors val="0"/>
+        <c:ser>
+          <c:idx val="0"/>
+          <c:order val="0"/>
+          <c:tx>
+            <c:strRef>
+              <c:f>Sheet1!$B$1</c:f>
+              <c:strCache>
+                <c:ptCount val="1"/>
+                <c:pt idx="0">
+                  <c:v>Crystallised complex (pembrolizumab + PD-1)</c:v>
+                </c:pt>
+              </c:strCache>
+            </c:strRef>
+          </c:tx>
+          <c:cat>
+            <c:strRef>
+              <c:f>Sheet1!$A$2:$A$4</c:f>
+              <c:strCache>
+                <c:ptCount val="3"/>
+                <c:pt idx="0">
+                  <c:v>recycling 3</c:v>
+                </c:pt>
+                <c:pt idx="1">
+                  <c:v>recycling 10</c:v>
+                </c:pt>
+                <c:pt idx="2">
+                  <c:v>recycling 20</c:v>
+                </c:pt>
+              </c:strCache>
+            </c:strRef>
+          </c:cat>
+          <c:val>
+            <c:numRef>
+              <c:f>Sheet1!$B$2:$B$4</c:f>
+              <c:numCache>
+                <c:formatCode>General</c:formatCode>
+                <c:ptCount val="3"/>
+                <c:pt idx="0">
+                  <c:v>0.842</c:v>
+                </c:pt>
+                <c:pt idx="1">
+                  <c:v>0.835</c:v>
+                </c:pt>
+                <c:pt idx="2">
+                  <c:v>0.885</c:v>
+                </c:pt>
+              </c:numCache>
+            </c:numRef>
+          </c:val>
+          <c:smooth val="0"/>
+        </c:ser>
+        <c:ser>
+          <c:idx val="1"/>
+          <c:order val="1"/>
+          <c:tx>
+            <c:strRef>
+              <c:f>Sheet1!$C$1</c:f>
+              <c:strCache>
+                <c:ptCount val="1"/>
+                <c:pt idx="0">
+                  <c:v>Our Challenge 1 design (near-native)</c:v>
+                </c:pt>
+              </c:strCache>
+            </c:strRef>
+          </c:tx>
+          <c:cat>
+            <c:strRef>
+              <c:f>Sheet1!$A$2:$A$4</c:f>
+              <c:strCache>
+                <c:ptCount val="3"/>
+                <c:pt idx="0">
+                  <c:v>recycling 3</c:v>
+                </c:pt>
+                <c:pt idx="1">
+                  <c:v>recycling 10</c:v>
+                </c:pt>
+                <c:pt idx="2">
+                  <c:v>recycling 20</c:v>
+                </c:pt>
+              </c:strCache>
+            </c:strRef>
+          </c:cat>
+          <c:val>
+            <c:numRef>
+              <c:f>Sheet1!$C$2:$C$4</c:f>
+              <c:numCache>
+                <c:formatCode>General</c:formatCode>
+                <c:ptCount val="3"/>
+                <c:pt idx="0">
+                  <c:v>0.824</c:v>
+                </c:pt>
+                <c:pt idx="1">
+                  <c:v>0.85</c:v>
+                </c:pt>
+                <c:pt idx="2">
+                  <c:v>0.859</c:v>
+                </c:pt>
+              </c:numCache>
+            </c:numRef>
+          </c:val>
+          <c:smooth val="0"/>
+        </c:ser>
+        <c:ser>
+          <c:idx val="2"/>
+          <c:order val="2"/>
+          <c:tx>
+            <c:strRef>
+              <c:f>Sheet1!$D$1</c:f>
+              <c:strCache>
+                <c:ptCount val="1"/>
+                <c:pt idx="0">
+                  <c:v>Our Challenge 2 design (de novo)</c:v>
+                </c:pt>
+              </c:strCache>
+            </c:strRef>
+          </c:tx>
+          <c:cat>
+            <c:strRef>
+              <c:f>Sheet1!$A$2:$A$4</c:f>
+              <c:strCache>
+                <c:ptCount val="3"/>
+                <c:pt idx="0">
+                  <c:v>recycling 3</c:v>
+                </c:pt>
+                <c:pt idx="1">
+                  <c:v>recycling 10</c:v>
+                </c:pt>
+                <c:pt idx="2">
+                  <c:v>recycling 20</c:v>
+                </c:pt>
+              </c:strCache>
+            </c:strRef>
+          </c:cat>
+          <c:val>
+            <c:numRef>
+              <c:f>Sheet1!$D$2:$D$4</c:f>
+              <c:numCache>
+                <c:formatCode>General</c:formatCode>
+                <c:ptCount val="3"/>
+                <c:pt idx="0">
+                  <c:v>0.263</c:v>
+                </c:pt>
+                <c:pt idx="1">
+                  <c:v>0.864</c:v>
+                </c:pt>
+                <c:pt idx="2">
+                  <c:v>0.795</c:v>
+                </c:pt>
+              </c:numCache>
+            </c:numRef>
+          </c:val>
+          <c:smooth val="0"/>
+        </c:ser>
+        <c:marker val="1"/>
+        <c:smooth val="0"/>
+        <c:axId val="2118791784"/>
+        <c:axId val="2140495176"/>
+      </c:lineChart>
+      <c:catAx>
+        <c:axId val="2118791784"/>
+        <c:scaling>
+          <c:orientation val="minMax"/>
+        </c:scaling>
+        <c:delete val="0"/>
+        <c:axPos val="b"/>
+        <c:majorTickMark val="out"/>
+        <c:minorTickMark val="none"/>
+        <c:tickLblPos val="nextTo"/>
+        <c:txPr>
+          <a:bodyPr/>
+          <a:lstStyle/>
+          <a:p>
+            <a:pPr>
+              <a:defRPr sz="1100"/>
+            </a:pPr>
+          </a:p>
+        </c:txPr>
+        <c:crossAx val="2140495176"/>
+        <c:crosses val="autoZero"/>
+        <c:auto val="1"/>
+        <c:lblAlgn val="ctr"/>
+        <c:lblOffset val="100"/>
+        <c:noMultiLvlLbl val="0"/>
+      </c:catAx>
+      <c:valAx>
+        <c:axId val="2140495176"/>
+        <c:scaling>
+          <c:max val="1.0"/>
+          <c:min val="0.0"/>
+        </c:scaling>
+        <c:delete val="0"/>
+        <c:axPos val="l"/>
+        <c:majorGridlines/>
+        <c:majorTickMark val="out"/>
+        <c:minorTickMark val="none"/>
+        <c:tickLblPos val="nextTo"/>
+        <c:txPr>
+          <a:bodyPr/>
+          <a:lstStyle/>
+          <a:p>
+            <a:pPr>
+              <a:defRPr sz="1100"/>
+            </a:pPr>
+          </a:p>
+        </c:txPr>
+        <c:crossAx val="2118791784"/>
+        <c:crosses val="autoZero"/>
+      </c:valAx>
+    </c:plotArea>
+    <c:legend>
+      <c:legendPos val="b"/>
+      <c:layout/>
+      <c:overlay val="0"/>
+      <c:txPr>
+        <a:bodyPr/>
+        <a:lstStyle/>
+        <a:p>
+          <a:pPr>
+            <a:defRPr sz="1100"/>
+          </a:pPr>
+        </a:p>
+      </c:txPr>
+    </c:legend>
+    <c:plotVisOnly val="1"/>
+    <c:dispBlanksAs val="gap"/>
+    <c:showDLblsOverMax val="0"/>
+  </c:chart>
+  <c:txPr>
+    <a:bodyPr/>
+    <a:lstStyle/>
+    <a:p>
+      <a:pPr>
+        <a:defRPr sz="1800"/>
+      </a:pPr>
+      <a:endParaRPr lang="en-US"/>
+    </a:p>
+  </c:txPr>
+  <c:externalData r:id="rId1">
+    <c:autoUpdate val="0"/>
+  </c:externalData>
+</c:chartSpace>
 </file>
 
 <file path=ppt/slideLayouts/slideLayout1.xml><?xml version="1.0" encoding="utf-8"?>
@@ -3094,35 +3346,14 @@
       <p:grpSpPr/>
       <p:sp>
         <p:nvSpPr>
-          <p:cNvPr id="2" name="Title 1"/>
-          <p:cNvSpPr>
-            <a:spLocks noGrp="1"/>
-          </p:cNvSpPr>
-          <p:nvPr>
-            <p:ph type="title"/>
-          </p:nvPr>
-        </p:nvSpPr>
-        <p:spPr/>
-        <p:txBody>
-          <a:bodyPr/>
-          <a:lstStyle/>
-          <a:p>
-            <a:r>
-              <a:t>We built the judge before the contestant — then showed the judge cannot see</a:t>
-            </a:r>
-          </a:p>
-        </p:txBody>
-      </p:sp>
-      <p:sp>
-        <p:nvSpPr>
-          <p:cNvPr id="3" name="TextBox 2"/>
+          <p:cNvPr id="2" name="TextBox 1"/>
           <p:cNvSpPr txBox="1"/>
           <p:nvPr/>
         </p:nvSpPr>
         <p:spPr>
           <a:xfrm>
-            <a:off x="640080" y="1463040"/>
-            <a:ext cx="10881360" cy="4754880"/>
+            <a:off x="640080" y="411480"/>
+            <a:ext cx="10881360" cy="914400"/>
           </a:xfrm>
           <a:prstGeom prst="rect">
             <a:avLst/>
@@ -3136,26 +3367,163 @@
           <a:lstStyle/>
           <a:p>
             <a:pPr>
-              <a:defRPr sz="1800"/>
-            </a:pPr>
-            <a:r>
-              <a:t>Challenge 1: ProteinMPNN redesign of pembrolizumab's heavy CDRs on 5GGS, folded with Boltz-2.</a:t>
+              <a:defRPr sz="3000" b="1">
+                <a:solidFill>
+                  <a:srgbClr val="1F4E79"/>
+                </a:solidFill>
+              </a:defRPr>
+            </a:pPr>
+            <a:r>
+              <a:t>We built the judge before the contestant — then used it to break our own results</a:t>
             </a:r>
           </a:p>
           <a:p>
             <a:pPr>
-              <a:defRPr sz="1800"/>
-            </a:pPr>
-            <a:r>
-              <a:t>Named design scores 96.0/100 and clears all eight hard cutoffs.</a:t>
-            </a:r>
-          </a:p>
+              <a:defRPr sz="1500">
+                <a:solidFill>
+                  <a:srgbClr val="606060"/>
+                </a:solidFill>
+              </a:defRPr>
+            </a:pPr>
+            <a:r>
+              <a:t>Anti-PD-1 antibody design · Challenge 1 and Challenge 2 · LOCKSMITH_DEV</a:t>
+            </a:r>
+          </a:p>
+        </p:txBody>
+      </p:sp>
+      <p:sp>
+        <p:nvSpPr>
+          <p:cNvPr id="3" name="TextBox 2"/>
+          <p:cNvSpPr txBox="1"/>
+          <p:nvPr/>
+        </p:nvSpPr>
+        <p:spPr>
+          <a:xfrm>
+            <a:off x="640080" y="1691640"/>
+            <a:ext cx="10881360" cy="4480560"/>
+          </a:xfrm>
+          <a:prstGeom prst="rect">
+            <a:avLst/>
+          </a:prstGeom>
+          <a:noFill/>
+        </p:spPr>
+        <p:txBody>
+          <a:bodyPr wrap="square">
+            <a:spAutoFit/>
+          </a:bodyPr>
+          <a:lstStyle/>
           <a:p>
             <a:pPr>
-              <a:defRPr sz="1800"/>
-            </a:pPr>
-            <a:r>
-              <a:t>That number is the least interesting thing in this deck.</a:t>
+              <a:spcAft>
+                <a:spcPts val="700"/>
+              </a:spcAft>
+              <a:defRPr sz="1700" b="1">
+                <a:solidFill>
+                  <a:srgbClr val="1A1A1A"/>
+                </a:solidFill>
+              </a:defRPr>
+            </a:pPr>
+            <a:r>
+              <a:t>Six of the eight scored metrics are computed from files we generate ourselves.</a:t>
+            </a:r>
+          </a:p>
+          <a:p>
+            <a:pPr lvl="1">
+              <a:spcAft>
+                <a:spcPts val="700"/>
+              </a:spcAft>
+              <a:defRPr sz="1500" b="0">
+                <a:solidFill>
+                  <a:srgbClr val="606060"/>
+                </a:solidFill>
+              </a:defRPr>
+            </a:pPr>
+            <a:r>
+              <a:t>So the rubric is gameable by anyone willing to submit a flattering structure, and every serious team's numbers will look alike. Hitting the numbers is not a differentiator.</a:t>
+            </a:r>
+          </a:p>
+          <a:p>
+            <a:pPr>
+              <a:spcAft>
+                <a:spcPts val="700"/>
+              </a:spcAft>
+              <a:defRPr sz="1700" b="0">
+                <a:solidFill>
+                  <a:srgbClr val="1A1A1A"/>
+                </a:solidFill>
+              </a:defRPr>
+            </a:pPr>
+          </a:p>
+          <a:p>
+            <a:pPr>
+              <a:spcAft>
+                <a:spcPts val="700"/>
+              </a:spcAft>
+              <a:defRPr sz="1700" b="1">
+                <a:solidFill>
+                  <a:srgbClr val="1A1A1A"/>
+                </a:solidFill>
+              </a:defRPr>
+            </a:pPr>
+            <a:r>
+              <a:t>We spent the week building controls that could FAIL, and then reporting it when they did.</a:t>
+            </a:r>
+          </a:p>
+          <a:p>
+            <a:pPr lvl="1">
+              <a:spcAft>
+                <a:spcPts val="700"/>
+              </a:spcAft>
+              <a:defRPr sz="1500" b="0">
+                <a:solidFill>
+                  <a:srgbClr val="606060"/>
+                </a:solidFill>
+              </a:defRPr>
+            </a:pPr>
+            <a:r>
+              <a:t>Epitope knockout · SKEMPI ΔΔG against 45 measured mutants · composition-matched scramble null · a contiguous-patch epitope null · three independent adversarial audits.</a:t>
+            </a:r>
+          </a:p>
+          <a:p>
+            <a:pPr>
+              <a:spcAft>
+                <a:spcPts val="700"/>
+              </a:spcAft>
+              <a:defRPr sz="1700" b="0">
+                <a:solidFill>
+                  <a:srgbClr val="1A1A1A"/>
+                </a:solidFill>
+              </a:defRPr>
+            </a:pPr>
+          </a:p>
+          <a:p>
+            <a:pPr>
+              <a:spcAft>
+                <a:spcPts val="700"/>
+              </a:spcAft>
+              <a:defRPr sz="1700" b="0">
+                <a:solidFill>
+                  <a:srgbClr val="606060"/>
+                </a:solidFill>
+              </a:defRPr>
+            </a:pPr>
+            <a:r>
+              <a:t>Both challenges are packaged and viable. Challenge 1 96.0/100, Challenge 2 96.0/100.</a:t>
+            </a:r>
+          </a:p>
+          <a:p>
+            <a:pPr lvl="1">
+              <a:spcAft>
+                <a:spcPts val="700"/>
+              </a:spcAft>
+              <a:defRPr sz="1500" b="1">
+                <a:solidFill>
+                  <a:srgbClr val="606060"/>
+                </a:solidFill>
+              </a:defRPr>
+            </a:pPr>
+            <a:r>
+              <a:t>That is the least interesting thing in this deck.</a:t>
             </a:r>
           </a:p>
         </p:txBody>
@@ -3180,35 +3548,14 @@
       <p:grpSpPr/>
       <p:sp>
         <p:nvSpPr>
-          <p:cNvPr id="2" name="Title 1"/>
-          <p:cNvSpPr>
-            <a:spLocks noGrp="1"/>
-          </p:cNvSpPr>
-          <p:nvPr>
-            <p:ph type="title"/>
-          </p:nvPr>
-        </p:nvSpPr>
-        <p:spPr/>
-        <p:txBody>
-          <a:bodyPr/>
-          <a:lstStyle/>
-          <a:p>
-            <a:r>
-              <a:t>The rubric's own metrics, measured against controls</a:t>
-            </a:r>
-          </a:p>
-        </p:txBody>
-      </p:sp>
-      <p:sp>
-        <p:nvSpPr>
-          <p:cNvPr id="3" name="TextBox 2"/>
+          <p:cNvPr id="2" name="TextBox 1"/>
           <p:cNvSpPr txBox="1"/>
           <p:nvPr/>
         </p:nvSpPr>
         <p:spPr>
           <a:xfrm>
-            <a:off x="640080" y="1463040"/>
-            <a:ext cx="10881360" cy="4754880"/>
+            <a:off x="640080" y="411480"/>
+            <a:ext cx="10881360" cy="914400"/>
           </a:xfrm>
           <a:prstGeom prst="rect">
             <a:avLst/>
@@ -3222,42 +3569,166 @@
           <a:lstStyle/>
           <a:p>
             <a:pPr>
-              <a:defRPr sz="1800"/>
-            </a:pPr>
-            <a:r>
-              <a:t>Epitope knockout (delete PD-1's binding face, matched off-interface control):</a:t>
+              <a:defRPr sz="3000" b="1">
+                <a:solidFill>
+                  <a:srgbClr val="1F4E79"/>
+                </a:solidFill>
+              </a:defRPr>
+            </a:pPr>
+            <a:r>
+              <a:t>The rubric's own metrics, measured against controls that could fail</a:t>
             </a:r>
           </a:p>
           <a:p>
             <a:pPr>
-              <a:defRPr sz="1800"/>
-            </a:pPr>
-            <a:r>
-              <a:t>   ipSAE and interface pLDDT respond — 17x and 64x their own seed noise.</a:t>
-            </a:r>
-          </a:p>
+              <a:defRPr sz="1500">
+                <a:solidFill>
+                  <a:srgbClr val="606060"/>
+                </a:solidFill>
+              </a:defRPr>
+            </a:pPr>
+            <a:r>
+              <a:t>Every number below is ours, and several are against our own interest</a:t>
+            </a:r>
+          </a:p>
+        </p:txBody>
+      </p:sp>
+      <p:sp>
+        <p:nvSpPr>
+          <p:cNvPr id="3" name="TextBox 2"/>
+          <p:cNvSpPr txBox="1"/>
+          <p:nvPr/>
+        </p:nvSpPr>
+        <p:spPr>
+          <a:xfrm>
+            <a:off x="640080" y="1691640"/>
+            <a:ext cx="10881360" cy="4480560"/>
+          </a:xfrm>
+          <a:prstGeom prst="rect">
+            <a:avLst/>
+          </a:prstGeom>
+          <a:noFill/>
+        </p:spPr>
+        <p:txBody>
+          <a:bodyPr wrap="square">
+            <a:spAutoFit/>
+          </a:bodyPr>
+          <a:lstStyle/>
           <a:p>
             <a:pPr>
-              <a:defRPr sz="1800"/>
-            </a:pPr>
-            <a:r>
-              <a:t>   PRODIGY dG and contact count do not. dG carries the largest share of our ranking.</a:t>
+              <a:spcAft>
+                <a:spcPts val="700"/>
+              </a:spcAft>
+              <a:defRPr sz="1700" b="1">
+                <a:solidFill>
+                  <a:srgbClr val="1A1A1A"/>
+                </a:solidFill>
+              </a:defRPr>
+            </a:pPr>
+            <a:r>
+              <a:t>Epitope knockout — delete PD-1's binding face, with a matched off-interface control:</a:t>
+            </a:r>
+          </a:p>
+          <a:p>
+            <a:pPr lvl="1">
+              <a:spcAft>
+                <a:spcPts val="700"/>
+              </a:spcAft>
+              <a:defRPr sz="1500" b="0">
+                <a:solidFill>
+                  <a:srgbClr val="606060"/>
+                </a:solidFill>
+              </a:defRPr>
+            </a:pPr>
+            <a:r>
+              <a:t>ipSAE and interface pLDDT respond at 17× and 64× their own seed noise. PRODIGY ΔG and contact count do not — and ΔG carried the largest share of our ranking.</a:t>
             </a:r>
           </a:p>
           <a:p>
             <a:pPr>
-              <a:defRPr sz="1800"/>
-            </a:pPr>
-            <a:r>
-              <a:t>Contacts ICC = 0.003 and CDR SASA ICC = 0.000 — pure sampler noise.</a:t>
+              <a:spcAft>
+                <a:spcPts val="700"/>
+              </a:spcAft>
+              <a:defRPr sz="1700" b="1">
+                <a:solidFill>
+                  <a:srgbClr val="1A1A1A"/>
+                </a:solidFill>
+              </a:defRPr>
+            </a:pPr>
+            <a:r>
+              <a:t>45 point mutants with measured ΔΔG (SKEMPI 2.0, 3HFM):</a:t>
+            </a:r>
+          </a:p>
+          <a:p>
+            <a:pPr lvl="1">
+              <a:spcAft>
+                <a:spcPts val="700"/>
+              </a:spcAft>
+              <a:defRPr sz="1500" b="0">
+                <a:solidFill>
+                  <a:srgbClr val="606060"/>
+                </a:solidFill>
+              </a:defRPr>
+            </a:pPr>
+            <a:r>
+              <a:t>No metric in the stack tracks affinity. A mutation that ABOLISHES binding scores ipSAE 0.917 against the wild type's 0.903.</a:t>
             </a:r>
           </a:p>
           <a:p>
             <a:pPr>
-              <a:defRPr sz="1800"/>
-            </a:pPr>
-            <a:r>
-              <a:t>Five of the eight rubric metrics are constants across our pool; the harness ranks on three.</a:t>
+              <a:spcAft>
+                <a:spcPts val="700"/>
+              </a:spcAft>
+              <a:defRPr sz="1700" b="1">
+                <a:solidFill>
+                  <a:srgbClr val="1A1A1A"/>
+                </a:solidFill>
+              </a:defRPr>
+            </a:pPr>
+            <a:r>
+              <a:t>Variance decomposition across the pool:</a:t>
+            </a:r>
+          </a:p>
+          <a:p>
+            <a:pPr lvl="1">
+              <a:spcAft>
+                <a:spcPts val="700"/>
+              </a:spcAft>
+              <a:defRPr sz="1500" b="0">
+                <a:solidFill>
+                  <a:srgbClr val="606060"/>
+                </a:solidFill>
+              </a:defRPr>
+            </a:pPr>
+            <a:r>
+              <a:t>Contacts ICC 0.003, CDR SASA 0.000 — sampler noise. Five of eight metrics are near-constant across our designs, so the harness effectively ranks on three.</a:t>
+            </a:r>
+          </a:p>
+          <a:p>
+            <a:pPr>
+              <a:spcAft>
+                <a:spcPts val="700"/>
+              </a:spcAft>
+              <a:defRPr sz="1700" b="0">
+                <a:solidFill>
+                  <a:srgbClr val="1A1A1A"/>
+                </a:solidFill>
+              </a:defRPr>
+            </a:pPr>
+          </a:p>
+          <a:p>
+            <a:pPr>
+              <a:spcAft>
+                <a:spcPts val="700"/>
+              </a:spcAft>
+              <a:defRPr sz="1700" b="1">
+                <a:solidFill>
+                  <a:srgbClr val="1F4E79"/>
+                </a:solidFill>
+              </a:defRPr>
+            </a:pPr>
+            <a:r>
+              <a:t>Conclusion we act on: this stack separates a destroyed interface from an intact one. It cannot rank two intact ones by affinity, and we do not claim it can.</a:t>
             </a:r>
           </a:p>
         </p:txBody>
@@ -3282,35 +3753,14 @@
       <p:grpSpPr/>
       <p:sp>
         <p:nvSpPr>
-          <p:cNvPr id="2" name="Title 1"/>
-          <p:cNvSpPr>
-            <a:spLocks noGrp="1"/>
-          </p:cNvSpPr>
-          <p:nvPr>
-            <p:ph type="title"/>
-          </p:nvPr>
-        </p:nvSpPr>
-        <p:spPr/>
-        <p:txBody>
-          <a:bodyPr/>
-          <a:lstStyle/>
-          <a:p>
-            <a:r>
-              <a:t>Against experiment: 45 mutants with measured ddG (SKEMPI, 3HFM)</a:t>
-            </a:r>
-          </a:p>
-        </p:txBody>
-      </p:sp>
-      <p:sp>
-        <p:nvSpPr>
-          <p:cNvPr id="3" name="TextBox 2"/>
+          <p:cNvPr id="2" name="TextBox 1"/>
           <p:cNvSpPr txBox="1"/>
           <p:nvPr/>
         </p:nvSpPr>
         <p:spPr>
           <a:xfrm>
-            <a:off x="640080" y="1463040"/>
-            <a:ext cx="10881360" cy="4754880"/>
+            <a:off x="640080" y="411480"/>
+            <a:ext cx="10881360" cy="914400"/>
           </a:xfrm>
           <a:prstGeom prst="rect">
             <a:avLst/>
@@ -3324,50 +3774,211 @@
           <a:lstStyle/>
           <a:p>
             <a:pPr>
-              <a:defRPr sz="1800"/>
-            </a:pPr>
-            <a:r>
-              <a:t>No metric tracks measured binding affinity (bound: no effect stronger than rho ~ 0.41).</a:t>
+              <a:defRPr sz="3000" b="1">
+                <a:solidFill>
+                  <a:srgbClr val="1F4E79"/>
+                </a:solidFill>
+              </a:defRPr>
+            </a:pPr>
+            <a:r>
+              <a:t>The finding: a de novo interface is not converged, and one number hides it</a:t>
             </a:r>
           </a:p>
           <a:p>
             <a:pPr>
-              <a:defRPr sz="1800"/>
-            </a:pPr>
-            <a:r>
-              <a:t>Mutations that abolish binding score like the wild type:</a:t>
-            </a:r>
-          </a:p>
+              <a:defRPr sz="1500">
+                <a:solidFill>
+                  <a:srgbClr val="606060"/>
+                </a:solidFill>
+              </a:defRPr>
+            </a:pPr>
+            <a:r>
+              <a:t>ipSAE of the SAME input re-folded at increasing Boltz recycling depth</a:t>
+            </a:r>
+          </a:p>
+        </p:txBody>
+      </p:sp>
+      <p:graphicFrame>
+        <p:nvGraphicFramePr>
+          <p:cNvPr id="3" name="Chart 2"/>
+          <p:cNvGraphicFramePr>
+            <a:graphicFrameLocks noGrp="1"/>
+          </p:cNvGraphicFramePr>
+          <p:nvPr/>
+        </p:nvGraphicFramePr>
+        <p:xfrm>
+          <a:off x="640080" y="1737360"/>
+          <a:ext cx="6858000" cy="4297680"/>
+        </p:xfrm>
+        <a:graphic>
+          <a:graphicData uri="http://schemas.openxmlformats.org/drawingml/2006/chart">
+            <c:chart xmlns:c="http://schemas.openxmlformats.org/drawingml/2006/chart" r:id="rId2"/>
+          </a:graphicData>
+        </a:graphic>
+      </p:graphicFrame>
+      <p:sp>
+        <p:nvSpPr>
+          <p:cNvPr id="4" name="TextBox 3"/>
+          <p:cNvSpPr txBox="1"/>
+          <p:nvPr/>
+        </p:nvSpPr>
+        <p:spPr>
+          <a:xfrm>
+            <a:off x="640080" y="1783080"/>
+            <a:ext cx="4206240" cy="4480560"/>
+          </a:xfrm>
+          <a:prstGeom prst="rect">
+            <a:avLst/>
+          </a:prstGeom>
+          <a:noFill/>
+        </p:spPr>
+        <p:txBody>
+          <a:bodyPr wrap="square">
+            <a:spAutoFit/>
+          </a:bodyPr>
+          <a:lstStyle/>
           <a:p>
             <a:pPr>
-              <a:defRPr sz="1800"/>
-            </a:pPr>
-            <a:r>
-              <a:t>   NL31A, ddG +21.8 kcal/mol -&gt; ipSAE 0.917 vs wild type 0.903.</a:t>
+              <a:spcAft>
+                <a:spcPts val="700"/>
+              </a:spcAft>
+              <a:defRPr sz="1400" b="1">
+                <a:solidFill>
+                  <a:srgbClr val="1A1A1A"/>
+                </a:solidFill>
+              </a:defRPr>
+            </a:pPr>
+            <a:r>
+              <a:t>Range across depth</a:t>
+            </a:r>
+          </a:p>
+          <a:p>
+            <a:pPr lvl="1">
+              <a:spcAft>
+                <a:spcPts val="700"/>
+              </a:spcAft>
+              <a:defRPr sz="1200" b="0">
+                <a:solidFill>
+                  <a:srgbClr val="606060"/>
+                </a:solidFill>
+              </a:defRPr>
+            </a:pPr>
+            <a:r>
+              <a:t>crystallised   0.050</a:t>
+            </a:r>
+          </a:p>
+          <a:p>
+            <a:pPr lvl="1">
+              <a:spcAft>
+                <a:spcPts val="700"/>
+              </a:spcAft>
+              <a:defRPr sz="1200" b="0">
+                <a:solidFill>
+                  <a:srgbClr val="606060"/>
+                </a:solidFill>
+              </a:defRPr>
+            </a:pPr>
+            <a:r>
+              <a:t>Challenge 1    0.036</a:t>
+            </a:r>
+          </a:p>
+          <a:p>
+            <a:pPr lvl="1">
+              <a:spcAft>
+                <a:spcPts val="700"/>
+              </a:spcAft>
+              <a:defRPr sz="1200" b="1">
+                <a:solidFill>
+                  <a:srgbClr val="B03020"/>
+                </a:solidFill>
+              </a:defRPr>
+            </a:pPr>
+            <a:r>
+              <a:t>Challenge 2    0.601   ← 12–17×</a:t>
             </a:r>
           </a:p>
           <a:p>
             <a:pPr>
-              <a:defRPr sz="1800"/>
-            </a:pPr>
-            <a:r>
-              <a:t>The metrics move a lot across mutants (ipSAE 19.5x its seed sd) — just not with affinity.</a:t>
-            </a:r>
+              <a:spcAft>
+                <a:spcPts val="700"/>
+              </a:spcAft>
+              <a:defRPr sz="1400" b="0">
+                <a:solidFill>
+                  <a:srgbClr val="1A1A1A"/>
+                </a:solidFill>
+              </a:defRPr>
+            </a:pPr>
           </a:p>
           <a:p>
             <a:pPr>
-              <a:defRPr sz="1800"/>
-            </a:pPr>
-            <a:r>
-              <a:t>Conclusion: this stack separates a destroyed interface from an intact one.</a:t>
+              <a:spcAft>
+                <a:spcPts val="700"/>
+              </a:spcAft>
+              <a:defRPr sz="1400" b="0">
+                <a:solidFill>
+                  <a:srgbClr val="1A1A1A"/>
+                </a:solidFill>
+              </a:defRPr>
+            </a:pPr>
+            <a:r>
+              <a:t>A near-native complex is essentially invariant in sampling depth.</a:t>
             </a:r>
           </a:p>
           <a:p>
             <a:pPr>
-              <a:defRPr sz="1800"/>
-            </a:pPr>
-            <a:r>
-              <a:t>It cannot rank two intact ones by affinity.</a:t>
+              <a:spcAft>
+                <a:spcPts val="700"/>
+              </a:spcAft>
+              <a:defRPr sz="1400" b="1">
+                <a:solidFill>
+                  <a:srgbClr val="1A1A1A"/>
+                </a:solidFill>
+              </a:defRPr>
+            </a:pPr>
+            <a:r>
+              <a:t>Ours is not converged at any depth we tested.</a:t>
+            </a:r>
+          </a:p>
+          <a:p>
+            <a:pPr>
+              <a:spcAft>
+                <a:spcPts val="700"/>
+              </a:spcAft>
+              <a:defRPr sz="1400" b="0">
+                <a:solidFill>
+                  <a:srgbClr val="1A1A1A"/>
+                </a:solidFill>
+              </a:defRPr>
+            </a:pPr>
+          </a:p>
+          <a:p>
+            <a:pPr>
+              <a:spcAft>
+                <a:spcPts val="700"/>
+              </a:spcAft>
+              <a:defRPr sz="1400" b="0">
+                <a:solidFill>
+                  <a:srgbClr val="606060"/>
+                </a:solidFill>
+              </a:defRPr>
+            </a:pPr>
+            <a:r>
+              <a:t>So our own headline is 93.6–96.0 depending on depth and seed, and we report it that way.</a:t>
+            </a:r>
+          </a:p>
+          <a:p>
+            <a:pPr>
+              <a:spcAft>
+                <a:spcPts val="700"/>
+              </a:spcAft>
+              <a:defRPr sz="1400" b="1">
+                <a:solidFill>
+                  <a:srgbClr val="1F4E79"/>
+                </a:solidFill>
+              </a:defRPr>
+            </a:pPr>
+            <a:r>
+              <a:t>The variance is a better result than the score.</a:t>
             </a:r>
           </a:p>
         </p:txBody>
@@ -3392,35 +4003,14 @@
       <p:grpSpPr/>
       <p:sp>
         <p:nvSpPr>
-          <p:cNvPr id="2" name="Title 1"/>
-          <p:cNvSpPr>
-            <a:spLocks noGrp="1"/>
-          </p:cNvSpPr>
-          <p:nvPr>
-            <p:ph type="title"/>
-          </p:nvPr>
-        </p:nvSpPr>
-        <p:spPr/>
-        <p:txBody>
-          <a:bodyPr/>
-          <a:lstStyle/>
-          <a:p>
-            <a:r>
-              <a:t>What our design is, honestly</a:t>
-            </a:r>
-          </a:p>
-        </p:txBody>
-      </p:sp>
-      <p:sp>
-        <p:nvSpPr>
-          <p:cNvPr id="3" name="TextBox 2"/>
+          <p:cNvPr id="2" name="TextBox 1"/>
           <p:cNvSpPr txBox="1"/>
           <p:nvPr/>
         </p:nvSpPr>
         <p:spPr>
           <a:xfrm>
-            <a:off x="640080" y="1463040"/>
-            <a:ext cx="10881360" cy="4754880"/>
+            <a:off x="640080" y="411480"/>
+            <a:ext cx="10881360" cy="914400"/>
           </a:xfrm>
           <a:prstGeom prst="rect">
             <a:avLst/>
@@ -3434,50 +4024,196 @@
           <a:lstStyle/>
           <a:p>
             <a:pPr>
-              <a:defRPr sz="1800"/>
-            </a:pPr>
-            <a:r>
-              <a:t>ipSAE 0.824 | DockQ 0.816 | dG -12.7 | NetSolP 0.569 | CDR-H3 identity 38.5%</a:t>
+              <a:defRPr sz="3000" b="1">
+                <a:solidFill>
+                  <a:srgbClr val="1F4E79"/>
+                </a:solidFill>
+              </a:defRPr>
+            </a:pPr>
+            <a:r>
+              <a:t>Four things we published this week and then broke ourselves</a:t>
             </a:r>
           </a:p>
           <a:p>
             <a:pPr>
-              <a:defRPr sz="1800"/>
-            </a:pPr>
-            <a:r>
-              <a:t>Specificity: predicted cross-reactivity with TIM-3, a same-fold checkpoint receptor.</a:t>
-            </a:r>
-          </a:p>
+              <a:defRPr sz="1500">
+                <a:solidFill>
+                  <a:srgbClr val="606060"/>
+                </a:solidFill>
+              </a:defRPr>
+            </a:pPr>
+            <a:r>
+              <a:t>Each was found by a control or an audit we built and ran on our own work</a:t>
+            </a:r>
+          </a:p>
+        </p:txBody>
+      </p:sp>
+      <p:sp>
+        <p:nvSpPr>
+          <p:cNvPr id="3" name="TextBox 2"/>
+          <p:cNvSpPr txBox="1"/>
+          <p:nvPr/>
+        </p:nvSpPr>
+        <p:spPr>
+          <a:xfrm>
+            <a:off x="640080" y="1691640"/>
+            <a:ext cx="10881360" cy="4480560"/>
+          </a:xfrm>
+          <a:prstGeom prst="rect">
+            <a:avLst/>
+          </a:prstGeom>
+          <a:noFill/>
+        </p:spPr>
+        <p:txBody>
+          <a:bodyPr wrap="square">
+            <a:spAutoFit/>
+          </a:bodyPr>
+          <a:lstStyle/>
           <a:p>
             <a:pPr>
-              <a:defRPr sz="1800"/>
-            </a:pPr>
-            <a:r>
-              <a:t>   0.513 vs pembrolizumab 0.331 vs a real TIM-3 binder 0.682 (p = 0.038, n = 8).</a:t>
+              <a:spcAft>
+                <a:spcPts val="700"/>
+              </a:spcAft>
+              <a:defRPr sz="1500" b="1">
+                <a:solidFill>
+                  <a:srgbClr val="B03020"/>
+                </a:solidFill>
+              </a:defRPr>
+            </a:pPr>
+            <a:r>
+              <a:t>“0 of 30 designs clear the gates.”</a:t>
+            </a:r>
+          </a:p>
+          <a:p>
+            <a:pPr lvl="1">
+              <a:spcAft>
+                <a:spcPts val="700"/>
+              </a:spcAft>
+              <a:defRPr sz="1300" b="0">
+                <a:solidFill>
+                  <a:srgbClr val="606060"/>
+                </a:solidFill>
+              </a:defRPr>
+            </a:pPr>
+            <a:r>
+              <a:t>An artefact of folding at recycling 3, a setting inherited from Challenge 1 unexamined. Re-folded: 1 of 30 clears. We withdrew the result and the essay attached to it.</a:t>
             </a:r>
           </a:p>
           <a:p>
             <a:pPr>
-              <a:defRPr sz="1800"/>
-            </a:pPr>
-            <a:r>
-              <a:t>Ranking within the viable pool is NOT supported by the metrics — and we can now price that:</a:t>
+              <a:spcAft>
+                <a:spcPts val="700"/>
+              </a:spcAft>
+              <a:defRPr sz="1500" b="1">
+                <a:solidFill>
+                  <a:srgbClr val="B03020"/>
+                </a:solidFill>
+              </a:defRPr>
+            </a:pPr>
+            <a:r>
+              <a:t>“The distribution is bimodal — 29 designs Boltz will not place at all.”</a:t>
+            </a:r>
+          </a:p>
+          <a:p>
+            <a:pPr lvl="1">
+              <a:spcAft>
+                <a:spcPts val="700"/>
+              </a:spcAft>
+              <a:defRPr sz="1300" b="0">
+                <a:solidFill>
+                  <a:srgbClr val="606060"/>
+                </a:solidFill>
+              </a:defRPr>
+            </a:pPr>
+            <a:r>
+              <a:t>An artefact of ipSAE's hard PAE cutoff. The 15 designs at exactly 0.000 carry ipTM 0.556–0.674 — an ordinary continuum. The metric manufactured the gap.</a:t>
             </a:r>
           </a:p>
           <a:p>
             <a:pPr>
-              <a:defRPr sz="1800"/>
-            </a:pPr>
-            <a:r>
-              <a:t>   correcting a band-convention bug in our own selection surrogate renames the winner, but by 0.19 points against a 0.23 seed sd.</a:t>
+              <a:spcAft>
+                <a:spcPts val="700"/>
+              </a:spcAft>
+              <a:defRPr sz="1500" b="1">
+                <a:solidFill>
+                  <a:srgbClr val="B03020"/>
+                </a:solidFill>
+              </a:defRPr>
+            </a:pPr>
+            <a:r>
+              <a:t>“Our aromatic CDR-H3 filter is validated (p &lt; 0.0001).”</a:t>
+            </a:r>
+          </a:p>
+          <a:p>
+            <a:pPr lvl="1">
+              <a:spcAft>
+                <a:spcPts val="700"/>
+              </a:spcAft>
+              <a:defRPr sz="1300" b="0">
+                <a:solidFill>
+                  <a:srgbClr val="606060"/>
+                </a:solidFill>
+              </a:defRPr>
+            </a:pPr>
+            <a:r>
+              <a:t>It beat its null only on outcomes that measure the PREDICTOR, and it reduces contact count — it selects against Tyr/Trp. Refuted and withdrawn as a design rule.</a:t>
             </a:r>
           </a:p>
           <a:p>
             <a:pPr>
-              <a:defRPr sz="1800"/>
-            </a:pPr>
-            <a:r>
-              <a:t>Developability is capped by the light chain, which we never redesigned.</a:t>
+              <a:spcAft>
+                <a:spcPts val="700"/>
+              </a:spcAft>
+              <a:defRPr sz="1500" b="1">
+                <a:solidFill>
+                  <a:srgbClr val="B03020"/>
+                </a:solidFill>
+              </a:defRPr>
+            </a:pPr>
+            <a:r>
+              <a:t>“Real epitope 0.712” — quoted for our submitted design.</a:t>
+            </a:r>
+          </a:p>
+          <a:p>
+            <a:pPr lvl="1">
+              <a:spcAft>
+                <a:spcPts val="700"/>
+              </a:spcAft>
+              <a:defRPr sz="1300" b="0">
+                <a:solidFill>
+                  <a:srgbClr val="606060"/>
+                </a:solidFill>
+              </a:defRPr>
+            </a:pPr>
+            <a:r>
+              <a:t>That was a POOL MEAN. This design's own value is 0.625, below the pool median. Our own catalogued error, committed inside the deliverable, caught by an outside reviewer.</a:t>
+            </a:r>
+          </a:p>
+          <a:p>
+            <a:pPr>
+              <a:spcAft>
+                <a:spcPts val="700"/>
+              </a:spcAft>
+              <a:defRPr sz="1500" b="0">
+                <a:solidFill>
+                  <a:srgbClr val="1A1A1A"/>
+                </a:solidFill>
+              </a:defRPr>
+            </a:pPr>
+          </a:p>
+          <a:p>
+            <a:pPr>
+              <a:spcAft>
+                <a:spcPts val="700"/>
+              </a:spcAft>
+              <a:defRPr sz="1500" b="1">
+                <a:solidFill>
+                  <a:srgbClr val="1F4E79"/>
+                </a:solidFill>
+              </a:defRPr>
+            </a:pPr>
+            <a:r>
+              <a:t>Every correction is in the submitted package, with the number that replaced it.</a:t>
             </a:r>
           </a:p>
         </p:txBody>
@@ -3502,35 +4238,14 @@
       <p:grpSpPr/>
       <p:sp>
         <p:nvSpPr>
-          <p:cNvPr id="2" name="Title 1"/>
-          <p:cNvSpPr>
-            <a:spLocks noGrp="1"/>
-          </p:cNvSpPr>
-          <p:nvPr>
-            <p:ph type="title"/>
-          </p:nvPr>
-        </p:nvSpPr>
-        <p:spPr/>
-        <p:txBody>
-          <a:bodyPr/>
-          <a:lstStyle/>
-          <a:p>
-            <a:r>
-              <a:t>What we would do next</a:t>
-            </a:r>
-          </a:p>
-        </p:txBody>
-      </p:sp>
-      <p:sp>
-        <p:nvSpPr>
-          <p:cNvPr id="3" name="TextBox 2"/>
+          <p:cNvPr id="2" name="TextBox 1"/>
           <p:cNvSpPr txBox="1"/>
           <p:nvPr/>
         </p:nvSpPr>
         <p:spPr>
           <a:xfrm>
-            <a:off x="640080" y="1463040"/>
-            <a:ext cx="10881360" cy="4754880"/>
+            <a:off x="640080" y="411480"/>
+            <a:ext cx="10881360" cy="914400"/>
           </a:xfrm>
           <a:prstGeom prst="rect">
             <a:avLst/>
@@ -3544,50 +4259,181 @@
           <a:lstStyle/>
           <a:p>
             <a:pPr>
-              <a:defRPr sz="1800"/>
-            </a:pPr>
-            <a:r>
-              <a:t>Redesign the light-chain CDRs — the NetSolP deficit sits there. VL is pembrolizumab's 0.569 in all 239 designs and `min()` pins the score to it.</a:t>
+              <a:defRPr sz="3000" b="1">
+                <a:solidFill>
+                  <a:srgbClr val="1F4E79"/>
+                </a:solidFill>
+              </a:defRPr>
+            </a:pPr>
+            <a:r>
+              <a:t>What the designs honestly are, and what we would do next</a:t>
             </a:r>
           </a:p>
           <a:p>
             <a:pPr>
-              <a:defRPr sz="1800"/>
-            </a:pPr>
-            <a:r>
-              <a:t>   (This design's VH is 0.699, just under the 0.70 Good edge — 168/239 of the pool clear it; this one does not.)</a:t>
-            </a:r>
-          </a:p>
+              <a:defRPr sz="1500">
+                <a:solidFill>
+                  <a:srgbClr val="606060"/>
+                </a:solidFill>
+              </a:defRPr>
+            </a:pPr>
+            <a:r>
+              <a:t>Stated at the front of both submissions, not the back</a:t>
+            </a:r>
+          </a:p>
+        </p:txBody>
+      </p:sp>
+      <p:sp>
+        <p:nvSpPr>
+          <p:cNvPr id="3" name="TextBox 2"/>
+          <p:cNvSpPr txBox="1"/>
+          <p:nvPr/>
+        </p:nvSpPr>
+        <p:spPr>
+          <a:xfrm>
+            <a:off x="640080" y="1691640"/>
+            <a:ext cx="10881360" cy="4480560"/>
+          </a:xfrm>
+          <a:prstGeom prst="rect">
+            <a:avLst/>
+          </a:prstGeom>
+          <a:noFill/>
+        </p:spPr>
+        <p:txBody>
+          <a:bodyPr wrap="square">
+            <a:spAutoFit/>
+          </a:bodyPr>
+          <a:lstStyle/>
           <a:p>
             <a:pPr>
-              <a:defRPr sz="1800"/>
-            </a:pPr>
-            <a:r>
-              <a:t>Validate any ranking claim against measured affinity before making it.</a:t>
+              <a:spcAft>
+                <a:spcPts val="700"/>
+              </a:spcAft>
+              <a:defRPr sz="1500" b="1">
+                <a:solidFill>
+                  <a:srgbClr val="1A1A1A"/>
+                </a:solidFill>
+              </a:defRPr>
+            </a:pPr>
+            <a:r>
+              <a:t>Challenge 1 — 96.0/100. 15 substitutions, 93.5% identical to Keytruda; CDR-H2 changed at ONE position. One loop genuinely redesigned.</a:t>
+            </a:r>
+          </a:p>
+          <a:p>
+            <a:pPr lvl="1">
+              <a:spcAft>
+                <a:spcPts val="700"/>
+              </a:spcAft>
+              <a:defRPr sz="1300" b="0">
+                <a:solidFill>
+                  <a:srgbClr val="606060"/>
+                </a:solidFill>
+              </a:defRPr>
+            </a:pPr>
+            <a:r>
+              <a:t>ipSAE 0.824 · DockQ 0.816 (the antibody–antigen interface alone is 0.723) · predicted TIM-3 cross-reactivity, disclosed against our interest.</a:t>
             </a:r>
           </a:p>
           <a:p>
             <a:pPr>
-              <a:defRPr sz="1800"/>
-            </a:pPr>
-            <a:r>
-              <a:t>Challenge 2 (de novo): RFantibody + ProteinMPNN, 30 designs, folded with Boltz-2. ONE clears all seven gates — 96.0/100, ipSAE 0.864.</a:t>
+              <a:spcAft>
+                <a:spcPts val="700"/>
+              </a:spcAft>
+              <a:defRPr sz="1500" b="1">
+                <a:solidFill>
+                  <a:srgbClr val="1A1A1A"/>
+                </a:solidFill>
+              </a:defRPr>
+            </a:pPr>
+            <a:r>
+              <a:t>Challenge 2 — 96.0/100, the ONE design of 30 that cleared.</a:t>
+            </a:r>
+          </a:p>
+          <a:p>
+            <a:pPr lvl="1">
+              <a:spcAft>
+                <a:spcPts val="700"/>
+              </a:spcAft>
+              <a:defRPr sz="1300" b="0">
+                <a:solidFill>
+                  <a:srgbClr val="606060"/>
+                </a:solidFill>
+              </a:defRPr>
+            </a:pPr>
+            <a:r>
+              <a:t>All six CDRs designed de novo — onto RFantibody's fixed trastuzumab framework, carried over unchanged. Targeting is evidenced (17/18 backbones beat a contiguous-patch null). Binding is evidenced by nothing here.</a:t>
             </a:r>
           </a:p>
           <a:p>
             <a:pPr>
-              <a:defRPr sz="1800"/>
-            </a:pPr>
-            <a:r>
-              <a:t>   Targeting is evidenced: 17/18 backbones beat a contiguous same-size patch null (0.712 vs 0.154). Binding is NOT evidenced by anything here.</a:t>
+              <a:spcAft>
+                <a:spcPts val="700"/>
+              </a:spcAft>
+              <a:defRPr sz="1500" b="1">
+                <a:solidFill>
+                  <a:srgbClr val="1A1A1A"/>
+                </a:solidFill>
+              </a:defRPr>
+            </a:pPr>
+            <a:r>
+              <a:t>Liabilities we found in our own designs, with the scanner we had promised and not written:</a:t>
+            </a:r>
+          </a:p>
+          <a:p>
+            <a:pPr lvl="1">
+              <a:spcAft>
+                <a:spcPts val="700"/>
+              </a:spcAft>
+              <a:defRPr sz="1300" b="0">
+                <a:solidFill>
+                  <a:srgbClr val="606060"/>
+                </a:solidFill>
+              </a:defRPr>
+            </a:pPr>
+            <a:r>
+              <a:t>Two N-glycosylation sequons in the Challenge 2 paratope; an NG deamidation motif left in Challenge 1's CDR-H2. Both violate §9.2. The scanner now exists and is regression-tested.</a:t>
             </a:r>
           </a:p>
           <a:p>
             <a:pPr>
-              <a:defRPr sz="1800"/>
-            </a:pPr>
-            <a:r>
-              <a:t>   The other 29 fail ipSAE alone, all at &lt;=0.331. At recycling 3 we measured 0/30 — an under-sampling artefact we caught and withdrew.</a:t>
+              <a:spcAft>
+                <a:spcPts val="700"/>
+              </a:spcAft>
+              <a:defRPr sz="1500" b="0">
+                <a:solidFill>
+                  <a:srgbClr val="1A1A1A"/>
+                </a:solidFill>
+              </a:defRPr>
+            </a:pPr>
+          </a:p>
+          <a:p>
+            <a:pPr>
+              <a:spcAft>
+                <a:spcPts val="700"/>
+              </a:spcAft>
+              <a:defRPr sz="1500" b="0">
+                <a:solidFill>
+                  <a:srgbClr val="606060"/>
+                </a:solidFill>
+              </a:defRPr>
+            </a:pPr>
+            <a:r>
+              <a:t>Next: redesign the light-chain CDRs (the whole NetSolP deficit sits there), fix the sequons, and validate any ranking claim against measured affinity before making it.</a:t>
+            </a:r>
+          </a:p>
+          <a:p>
+            <a:pPr>
+              <a:spcAft>
+                <a:spcPts val="700"/>
+              </a:spcAft>
+              <a:defRPr sz="1500" b="1">
+                <a:solidFill>
+                  <a:srgbClr val="1F4E79"/>
+                </a:solidFill>
+              </a:defRPr>
+            </a:pPr>
+            <a:r>
+              <a:t>We would rather hand you a design we can characterise than one we can only score.</a:t>
             </a:r>
           </a:p>
         </p:txBody>

--- a/submission/LOCKSMITH_DEV/pitch/LOCKSMITH_DEV_presentation.pptx
+++ b/submission/LOCKSMITH_DEV/pitch/LOCKSMITH_DEV_presentation.pptx
@@ -3849,7 +3849,7 @@
               </a:defRPr>
             </a:pPr>
             <a:r>
-              <a:t>Range across depth</a:t>
+              <a:t>ipSAE range across recycling depth</a:t>
             </a:r>
           </a:p>
           <a:p>
@@ -3956,15 +3956,57 @@
               <a:spcAft>
                 <a:spcPts val="700"/>
               </a:spcAft>
+              <a:defRPr sz="1400" b="1">
+                <a:solidFill>
+                  <a:srgbClr val="1A1A1A"/>
+                </a:solidFill>
+              </a:defRPr>
+            </a:pPr>
+            <a:r>
+              <a:t>A second axis, same story:</a:t>
+            </a:r>
+          </a:p>
+          <a:p>
+            <a:pPr lvl="1">
+              <a:spcAft>
+                <a:spcPts val="700"/>
+              </a:spcAft>
+              <a:defRPr sz="1200" b="0">
+                <a:solidFill>
+                  <a:srgbClr val="606060"/>
+                </a:solidFill>
+              </a:defRPr>
+            </a:pPr>
+            <a:r>
+              <a:t>Boltz returns its models RANKED. With diffusion_samples=1 you get the argmax, not a sample. Asking for five costs 2m54s vs 2m.</a:t>
+            </a:r>
+          </a:p>
+          <a:p>
+            <a:pPr lvl="1">
+              <a:spcAft>
+                <a:spcPts val="700"/>
+              </a:spcAft>
+              <a:defRPr sz="1200" b="1">
+                <a:solidFill>
+                  <a:srgbClr val="B03020"/>
+                </a:solidFill>
+              </a:defRPr>
+            </a:pPr>
+            <a:r>
+              <a:t>Ch1 94.0–96.0 · Ch2 91.2–96.0</a:t>
+            </a:r>
+          </a:p>
+          <a:p>
+            <a:pPr>
+              <a:spcAft>
+                <a:spcPts val="700"/>
+              </a:spcAft>
               <a:defRPr sz="1400" b="0">
                 <a:solidFill>
-                  <a:srgbClr val="606060"/>
-                </a:solidFill>
-              </a:defRPr>
-            </a:pPr>
-            <a:r>
-              <a:t>So our own headline is 93.6–96.0 depending on depth and seed, and we report it that way.</a:t>
-            </a:r>
+                  <a:srgbClr val="1A1A1A"/>
+                </a:solidFill>
+              </a:defRPr>
+            </a:pPr>
           </a:p>
           <a:p>
             <a:pPr>
@@ -3978,7 +4020,7 @@
               </a:defRPr>
             </a:pPr>
             <a:r>
-              <a:t>The variance is a better result than the score.</a:t>
+              <a:t>Every pose-derived number we have ever reported sat at the top of a distribution we never sampled.</a:t>
             </a:r>
           </a:p>
         </p:txBody>

--- a/submission/LOCKSMITH_DEV/pitch/LOCKSMITH_DEV_presentation.pptx
+++ b/submission/LOCKSMITH_DEV/pitch/LOCKSMITH_DEV_presentation.pptx
@@ -10,6 +10,7 @@
     <p:sldId id="258" r:id="rId9"/>
     <p:sldId id="259" r:id="rId10"/>
     <p:sldId id="260" r:id="rId11"/>
+    <p:sldId id="261" r:id="rId12"/>
   </p:sldIdLst>
   <p:sldSz cx="12191695" cy="6858000" type="screen4x3"/>
   <p:notesSz cx="6858000" cy="9144000"/>
@@ -4308,7 +4309,7 @@
               </a:defRPr>
             </a:pPr>
             <a:r>
-              <a:t>What the designs honestly are, and what we would do next</a:t>
+              <a:t>Two textbook fixes for the same liability. They differ by 60×.</a:t>
             </a:r>
           </a:p>
           <a:p>
@@ -4320,7 +4321,7 @@
               </a:defRPr>
             </a:pPr>
             <a:r>
-              <a:t>Stated at the front of both submissions, not the back</a:t>
+              <a:t>Our Challenge 2 design had two N-glycosylation sequons in its paratope — handbook §9.2 forbids them</a:t>
             </a:r>
           </a:p>
         </p:txBody>
@@ -4358,7 +4359,22 @@
               </a:defRPr>
             </a:pPr>
             <a:r>
-              <a:t>Challenge 1 — 96.0/100. 15 substitutions, 93.5% identical to Keytruda; CDR-H2 changed at ONE position. One loop genuinely redesigned.</a:t>
+              <a:t>§9 prescribes two remedies and presents them as interchangeable: N→Q or S→A.</a:t>
+            </a:r>
+          </a:p>
+          <a:p>
+            <a:pPr>
+              <a:spcAft>
+                <a:spcPts val="700"/>
+              </a:spcAft>
+              <a:defRPr sz="1500" b="1">
+                <a:solidFill>
+                  <a:srgbClr val="1A1A1A"/>
+                </a:solidFill>
+              </a:defRPr>
+            </a:pPr>
+            <a:r>
+              <a:t>The structure said which, before we folded anything:</a:t>
             </a:r>
           </a:p>
           <a:p>
@@ -4373,8 +4389,20 @@
               </a:defRPr>
             </a:pPr>
             <a:r>
-              <a:t>ipSAE 0.824 · DockQ 0.816 (the antibody–antigen interface alone is 0.723) · predicted TIM-3 cross-reactivity, disclosed against our interest.</a:t>
-            </a:r>
+              <a:t>the glycosylation acceptors ARE the binding residues — H N52 and L N49 carry 29 antigen contacts between them. The serines completing the motifs carry ZERO.</a:t>
+            </a:r>
+          </a:p>
+          <a:p>
+            <a:pPr>
+              <a:spcAft>
+                <a:spcPts val="700"/>
+              </a:spcAft>
+              <a:defRPr sz="1500" b="0">
+                <a:solidFill>
+                  <a:srgbClr val="1A1A1A"/>
+                </a:solidFill>
+              </a:defRPr>
+            </a:pPr>
           </a:p>
           <a:p>
             <a:pPr>
@@ -4383,12 +4411,199 @@
               </a:spcAft>
               <a:defRPr sz="1500" b="1">
                 <a:solidFill>
+                  <a:srgbClr val="B03020"/>
+                </a:solidFill>
+              </a:defRPr>
+            </a:pPr>
+            <a:r>
+              <a:t>N→Q  (mutate the asparagines):  ipSAE 0.864 → 0.014.  Dead, ±0.001 over 5 samples.</a:t>
+            </a:r>
+          </a:p>
+          <a:p>
+            <a:pPr>
+              <a:spcAft>
+                <a:spcPts val="700"/>
+              </a:spcAft>
+              <a:defRPr sz="1500" b="1">
+                <a:solidFill>
+                  <a:srgbClr val="1F4E79"/>
+                </a:solidFill>
+              </a:defRPr>
+            </a:pPr>
+            <a:r>
+              <a:t>S→A  (mutate the serines):      viable 5/5, both sequons gone, §9.2 passes.</a:t>
+            </a:r>
+          </a:p>
+          <a:p>
+            <a:pPr>
+              <a:spcAft>
+                <a:spcPts val="700"/>
+              </a:spcAft>
+              <a:defRPr sz="1500" b="0">
+                <a:solidFill>
                   <a:srgbClr val="1A1A1A"/>
                 </a:solidFill>
               </a:defRPr>
             </a:pPr>
-            <a:r>
-              <a:t>Challenge 2 — 96.0/100, the ONE design of 30 that cleared.</a:t>
+          </a:p>
+          <a:p>
+            <a:pPr>
+              <a:spcAft>
+                <a:spcPts val="700"/>
+              </a:spcAft>
+              <a:defRPr sz="1500" b="1">
+                <a:solidFill>
+                  <a:srgbClr val="1A1A1A"/>
+                </a:solidFill>
+              </a:defRPr>
+            </a:pPr>
+            <a:r>
+              <a:t>A developability fix is a DESIGN CHANGE. Prescribed fixes are not interchangeable, and the structure tells you which one in a minute.</a:t>
+            </a:r>
+          </a:p>
+          <a:p>
+            <a:pPr>
+              <a:spcAft>
+                <a:spcPts val="700"/>
+              </a:spcAft>
+              <a:defRPr sz="1500" b="0">
+                <a:solidFill>
+                  <a:srgbClr val="1A1A1A"/>
+                </a:solidFill>
+              </a:defRPr>
+            </a:pPr>
+          </a:p>
+          <a:p>
+            <a:pPr>
+              <a:spcAft>
+                <a:spcPts val="700"/>
+              </a:spcAft>
+              <a:defRPr sz="1500" b="0">
+                <a:solidFill>
+                  <a:srgbClr val="606060"/>
+                </a:solidFill>
+              </a:defRPr>
+            </a:pPr>
+            <a:r>
+              <a:t>We submitted S→A — and it costs us 4.8 points, because its best sample falls below the ipSAE Good edge. §9.2 asks for it; §5.2 does not pay for it.</a:t>
+            </a:r>
+          </a:p>
+          <a:p>
+            <a:pPr>
+              <a:spcAft>
+                <a:spcPts val="700"/>
+              </a:spcAft>
+              <a:defRPr sz="1500" b="1">
+                <a:solidFill>
+                  <a:srgbClr val="1F4E79"/>
+                </a:solidFill>
+              </a:defRPr>
+            </a:pPr>
+            <a:r>
+              <a:t>A candidate with glycans in its binding site is not a candidate.</a:t>
+            </a:r>
+          </a:p>
+        </p:txBody>
+      </p:sp>
+    </p:spTree>
+  </p:cSld>
+  <p:clrMapOvr>
+    <a:masterClrMapping/>
+  </p:clrMapOvr>
+</p:sld>
+</file>
+
+<file path=ppt/slides/slide6.xml><?xml version="1.0" encoding="utf-8"?>
+<p:sld xmlns:a="http://schemas.openxmlformats.org/drawingml/2006/main" xmlns:p="http://schemas.openxmlformats.org/presentationml/2006/main" xmlns:r="http://schemas.openxmlformats.org/officeDocument/2006/relationships">
+  <p:cSld>
+    <p:spTree>
+      <p:nvGrpSpPr>
+        <p:cNvPr id="1" name=""/>
+        <p:cNvGrpSpPr/>
+        <p:nvPr/>
+      </p:nvGrpSpPr>
+      <p:grpSpPr/>
+      <p:sp>
+        <p:nvSpPr>
+          <p:cNvPr id="2" name="TextBox 1"/>
+          <p:cNvSpPr txBox="1"/>
+          <p:nvPr/>
+        </p:nvSpPr>
+        <p:spPr>
+          <a:xfrm>
+            <a:off x="640080" y="411480"/>
+            <a:ext cx="10881360" cy="914400"/>
+          </a:xfrm>
+          <a:prstGeom prst="rect">
+            <a:avLst/>
+          </a:prstGeom>
+          <a:noFill/>
+        </p:spPr>
+        <p:txBody>
+          <a:bodyPr wrap="square">
+            <a:spAutoFit/>
+          </a:bodyPr>
+          <a:lstStyle/>
+          <a:p>
+            <a:pPr>
+              <a:defRPr sz="3000" b="1">
+                <a:solidFill>
+                  <a:srgbClr val="1F4E79"/>
+                </a:solidFill>
+              </a:defRPr>
+            </a:pPr>
+            <a:r>
+              <a:t>What the designs honestly are, and what we would do next</a:t>
+            </a:r>
+          </a:p>
+          <a:p>
+            <a:pPr>
+              <a:defRPr sz="1500">
+                <a:solidFill>
+                  <a:srgbClr val="606060"/>
+                </a:solidFill>
+              </a:defRPr>
+            </a:pPr>
+            <a:r>
+              <a:t>Stated at the front of both submissions, not the back</a:t>
+            </a:r>
+          </a:p>
+        </p:txBody>
+      </p:sp>
+      <p:sp>
+        <p:nvSpPr>
+          <p:cNvPr id="3" name="TextBox 2"/>
+          <p:cNvSpPr txBox="1"/>
+          <p:nvPr/>
+        </p:nvSpPr>
+        <p:spPr>
+          <a:xfrm>
+            <a:off x="640080" y="1691640"/>
+            <a:ext cx="10881360" cy="4480560"/>
+          </a:xfrm>
+          <a:prstGeom prst="rect">
+            <a:avLst/>
+          </a:prstGeom>
+          <a:noFill/>
+        </p:spPr>
+        <p:txBody>
+          <a:bodyPr wrap="square">
+            <a:spAutoFit/>
+          </a:bodyPr>
+          <a:lstStyle/>
+          <a:p>
+            <a:pPr>
+              <a:spcAft>
+                <a:spcPts val="700"/>
+              </a:spcAft>
+              <a:defRPr sz="1500" b="1">
+                <a:solidFill>
+                  <a:srgbClr val="1A1A1A"/>
+                </a:solidFill>
+              </a:defRPr>
+            </a:pPr>
+            <a:r>
+              <a:t>Challenge 1 — 96.0/100 (94.0–96.0 across diffusion samples). 15 substitutions, 93.5% identical to Keytruda; CDR-H2 changed at ONE position. One loop genuinely redesigned.</a:t>
             </a:r>
           </a:p>
           <a:p>
@@ -4403,7 +4618,7 @@
               </a:defRPr>
             </a:pPr>
             <a:r>
-              <a:t>All six CDRs designed de novo — onto RFantibody's fixed trastuzumab framework, carried over unchanged. Targeting is evidenced (17/18 backbones beat a contiguous-patch null). Binding is evidenced by nothing here.</a:t>
+              <a:t>It also fails §9.2 — an NG deamidation motif in CDR-H2, at a position we made designable and left alone. Found by the scanner we built after missing the Challenge 2 sequons.</a:t>
             </a:r>
           </a:p>
           <a:p>
@@ -4418,7 +4633,7 @@
               </a:defRPr>
             </a:pPr>
             <a:r>
-              <a:t>Liabilities we found in our own designs, with the scanner we had promised and not written:</a:t>
+              <a:t>Challenge 2 — 91.2/100, the ONE design of 30 that cleared, sequon-fixed.</a:t>
             </a:r>
           </a:p>
           <a:p>
@@ -4433,7 +4648,22 @@
               </a:defRPr>
             </a:pPr>
             <a:r>
-              <a:t>Two N-glycosylation sequons in the Challenge 2 paratope; an NG deamidation motif left in Challenge 1's CDR-H2. Both violate §9.2. The scanner now exists and is regression-tested.</a:t>
+              <a:t>All six CDRs designed de novo — onto RFantibody's fixed trastuzumab framework, carried over unchanged. Targeting is evidenced: 17/18 backbones beat a contiguous-patch null. Binding is evidenced by nothing here.</a:t>
+            </a:r>
+          </a:p>
+          <a:p>
+            <a:pPr lvl="1">
+              <a:spcAft>
+                <a:spcPts val="700"/>
+              </a:spcAft>
+              <a:defRPr sz="1300" b="1">
+                <a:solidFill>
+                  <a:srgbClr val="B03020"/>
+                </a:solidFill>
+              </a:defRPr>
+            </a:pPr>
+            <a:r>
+              <a:t>Viable in 5 of 5 diffusion samples — with the lowest 0.019 above the cutoff.</a:t>
             </a:r>
           </a:p>
           <a:p>
@@ -4460,7 +4690,7 @@
               </a:defRPr>
             </a:pPr>
             <a:r>
-              <a:t>Next: redesign the light-chain CDRs (the whole NetSolP deficit sits there), fix the sequons, and validate any ranking claim against measured affinity before making it.</a:t>
+              <a:t>Next: redesign Challenge 1's light chain (the entire NetSolP deficit sits there, untouched), remove the NG motif, and validate any ranking claim against measured affinity before making it.</a:t>
             </a:r>
           </a:p>
           <a:p>

--- a/submission/LOCKSMITH_DEV/pitch/LOCKSMITH_DEV_presentation.pptx
+++ b/submission/LOCKSMITH_DEV/pitch/LOCKSMITH_DEV_presentation.pptx
@@ -4683,6 +4683,21 @@
               <a:spcAft>
                 <a:spcPts val="700"/>
               </a:spcAft>
+              <a:defRPr sz="1500" b="1">
+                <a:solidFill>
+                  <a:srgbClr val="B03020"/>
+                </a:solidFill>
+              </a:defRPr>
+            </a:pPr>
+            <a:r>
+              <a:t>We tested our own advice and it failed: 24 ProteinMPNN light chains move VL +0.023 against a required +0.131, 0/24 reach the edge, and 24/24 add new CDR liabilities. The NetSolP ceiling is the HEAVY chain, by 0.001.</a:t>
+            </a:r>
+          </a:p>
+          <a:p>
+            <a:pPr>
+              <a:spcAft>
+                <a:spcPts val="700"/>
+              </a:spcAft>
               <a:defRPr sz="1500" b="0">
                 <a:solidFill>
                   <a:srgbClr val="606060"/>
@@ -4690,7 +4705,7 @@
               </a:defRPr>
             </a:pPr>
             <a:r>
-              <a:t>Next: redesign Challenge 1's light chain (the entire NetSolP deficit sits there, untouched), remove the NG motif, and validate any ranking claim against measured affinity before making it.</a:t>
+              <a:t>Next: a solubility-aware design objective — ProteinMPNN optimises sequence recovery given a backbone, and solubility is not in its loss. Not: more of the same sampler.</a:t>
             </a:r>
           </a:p>
           <a:p>

--- a/submission/LOCKSMITH_DEV/pitch/LOCKSMITH_DEV_presentation.pptx
+++ b/submission/LOCKSMITH_DEV/pitch/LOCKSMITH_DEV_presentation.pptx
@@ -110,258 +110,6 @@
     </a:lvl9pPr>
   </p:defaultTextStyle>
 </p:presentation>
-</file>
-
-<file path=ppt/charts/chart1.xml><?xml version="1.0" encoding="utf-8"?>
-<c:chartSpace xmlns:c="http://schemas.openxmlformats.org/drawingml/2006/chart" xmlns:a="http://schemas.openxmlformats.org/drawingml/2006/main" xmlns:r="http://schemas.openxmlformats.org/officeDocument/2006/relationships">
-  <c:date1904 val="0"/>
-  <c:chart>
-    <c:autoTitleDeleted val="0"/>
-    <c:plotArea>
-      <c:lineChart>
-        <c:grouping val="standard"/>
-        <c:varyColors val="0"/>
-        <c:ser>
-          <c:idx val="0"/>
-          <c:order val="0"/>
-          <c:tx>
-            <c:strRef>
-              <c:f>Sheet1!$B$1</c:f>
-              <c:strCache>
-                <c:ptCount val="1"/>
-                <c:pt idx="0">
-                  <c:v>Crystallised complex (pembrolizumab + PD-1)</c:v>
-                </c:pt>
-              </c:strCache>
-            </c:strRef>
-          </c:tx>
-          <c:cat>
-            <c:strRef>
-              <c:f>Sheet1!$A$2:$A$4</c:f>
-              <c:strCache>
-                <c:ptCount val="3"/>
-                <c:pt idx="0">
-                  <c:v>recycling 3</c:v>
-                </c:pt>
-                <c:pt idx="1">
-                  <c:v>recycling 10</c:v>
-                </c:pt>
-                <c:pt idx="2">
-                  <c:v>recycling 20</c:v>
-                </c:pt>
-              </c:strCache>
-            </c:strRef>
-          </c:cat>
-          <c:val>
-            <c:numRef>
-              <c:f>Sheet1!$B$2:$B$4</c:f>
-              <c:numCache>
-                <c:formatCode>General</c:formatCode>
-                <c:ptCount val="3"/>
-                <c:pt idx="0">
-                  <c:v>0.842</c:v>
-                </c:pt>
-                <c:pt idx="1">
-                  <c:v>0.835</c:v>
-                </c:pt>
-                <c:pt idx="2">
-                  <c:v>0.885</c:v>
-                </c:pt>
-              </c:numCache>
-            </c:numRef>
-          </c:val>
-          <c:smooth val="0"/>
-        </c:ser>
-        <c:ser>
-          <c:idx val="1"/>
-          <c:order val="1"/>
-          <c:tx>
-            <c:strRef>
-              <c:f>Sheet1!$C$1</c:f>
-              <c:strCache>
-                <c:ptCount val="1"/>
-                <c:pt idx="0">
-                  <c:v>Our Challenge 1 design (near-native)</c:v>
-                </c:pt>
-              </c:strCache>
-            </c:strRef>
-          </c:tx>
-          <c:cat>
-            <c:strRef>
-              <c:f>Sheet1!$A$2:$A$4</c:f>
-              <c:strCache>
-                <c:ptCount val="3"/>
-                <c:pt idx="0">
-                  <c:v>recycling 3</c:v>
-                </c:pt>
-                <c:pt idx="1">
-                  <c:v>recycling 10</c:v>
-                </c:pt>
-                <c:pt idx="2">
-                  <c:v>recycling 20</c:v>
-                </c:pt>
-              </c:strCache>
-            </c:strRef>
-          </c:cat>
-          <c:val>
-            <c:numRef>
-              <c:f>Sheet1!$C$2:$C$4</c:f>
-              <c:numCache>
-                <c:formatCode>General</c:formatCode>
-                <c:ptCount val="3"/>
-                <c:pt idx="0">
-                  <c:v>0.824</c:v>
-                </c:pt>
-                <c:pt idx="1">
-                  <c:v>0.85</c:v>
-                </c:pt>
-                <c:pt idx="2">
-                  <c:v>0.859</c:v>
-                </c:pt>
-              </c:numCache>
-            </c:numRef>
-          </c:val>
-          <c:smooth val="0"/>
-        </c:ser>
-        <c:ser>
-          <c:idx val="2"/>
-          <c:order val="2"/>
-          <c:tx>
-            <c:strRef>
-              <c:f>Sheet1!$D$1</c:f>
-              <c:strCache>
-                <c:ptCount val="1"/>
-                <c:pt idx="0">
-                  <c:v>Our Challenge 2 design (de novo)</c:v>
-                </c:pt>
-              </c:strCache>
-            </c:strRef>
-          </c:tx>
-          <c:cat>
-            <c:strRef>
-              <c:f>Sheet1!$A$2:$A$4</c:f>
-              <c:strCache>
-                <c:ptCount val="3"/>
-                <c:pt idx="0">
-                  <c:v>recycling 3</c:v>
-                </c:pt>
-                <c:pt idx="1">
-                  <c:v>recycling 10</c:v>
-                </c:pt>
-                <c:pt idx="2">
-                  <c:v>recycling 20</c:v>
-                </c:pt>
-              </c:strCache>
-            </c:strRef>
-          </c:cat>
-          <c:val>
-            <c:numRef>
-              <c:f>Sheet1!$D$2:$D$4</c:f>
-              <c:numCache>
-                <c:formatCode>General</c:formatCode>
-                <c:ptCount val="3"/>
-                <c:pt idx="0">
-                  <c:v>0.263</c:v>
-                </c:pt>
-                <c:pt idx="1">
-                  <c:v>0.864</c:v>
-                </c:pt>
-                <c:pt idx="2">
-                  <c:v>0.795</c:v>
-                </c:pt>
-              </c:numCache>
-            </c:numRef>
-          </c:val>
-          <c:smooth val="0"/>
-        </c:ser>
-        <c:marker val="1"/>
-        <c:smooth val="0"/>
-        <c:axId val="2118791784"/>
-        <c:axId val="2140495176"/>
-      </c:lineChart>
-      <c:catAx>
-        <c:axId val="2118791784"/>
-        <c:scaling>
-          <c:orientation val="minMax"/>
-        </c:scaling>
-        <c:delete val="0"/>
-        <c:axPos val="b"/>
-        <c:majorTickMark val="out"/>
-        <c:minorTickMark val="none"/>
-        <c:tickLblPos val="nextTo"/>
-        <c:txPr>
-          <a:bodyPr/>
-          <a:lstStyle/>
-          <a:p>
-            <a:pPr>
-              <a:defRPr sz="1100"/>
-            </a:pPr>
-          </a:p>
-        </c:txPr>
-        <c:crossAx val="2140495176"/>
-        <c:crosses val="autoZero"/>
-        <c:auto val="1"/>
-        <c:lblAlgn val="ctr"/>
-        <c:lblOffset val="100"/>
-        <c:noMultiLvlLbl val="0"/>
-      </c:catAx>
-      <c:valAx>
-        <c:axId val="2140495176"/>
-        <c:scaling>
-          <c:max val="1.0"/>
-          <c:min val="0.0"/>
-        </c:scaling>
-        <c:delete val="0"/>
-        <c:axPos val="l"/>
-        <c:majorGridlines/>
-        <c:majorTickMark val="out"/>
-        <c:minorTickMark val="none"/>
-        <c:tickLblPos val="nextTo"/>
-        <c:txPr>
-          <a:bodyPr/>
-          <a:lstStyle/>
-          <a:p>
-            <a:pPr>
-              <a:defRPr sz="1100"/>
-            </a:pPr>
-          </a:p>
-        </c:txPr>
-        <c:crossAx val="2118791784"/>
-        <c:crosses val="autoZero"/>
-      </c:valAx>
-    </c:plotArea>
-    <c:legend>
-      <c:legendPos val="b"/>
-      <c:layout/>
-      <c:overlay val="0"/>
-      <c:txPr>
-        <a:bodyPr/>
-        <a:lstStyle/>
-        <a:p>
-          <a:pPr>
-            <a:defRPr sz="1100"/>
-          </a:pPr>
-        </a:p>
-      </c:txPr>
-    </c:legend>
-    <c:plotVisOnly val="1"/>
-    <c:dispBlanksAs val="gap"/>
-    <c:showDLblsOverMax val="0"/>
-  </c:chart>
-  <c:txPr>
-    <a:bodyPr/>
-    <a:lstStyle/>
-    <a:p>
-      <a:pPr>
-        <a:defRPr sz="1800"/>
-      </a:pPr>
-      <a:endParaRPr lang="en-US"/>
-    </a:p>
-  </c:txPr>
-  <c:externalData r:id="rId1">
-    <c:autoUpdate val="0"/>
-  </c:externalData>
-</c:chartSpace>
 </file>
 
 <file path=ppt/slideLayouts/slideLayout1.xml><?xml version="1.0" encoding="utf-8"?>
@@ -3375,7 +3123,7 @@
               </a:defRPr>
             </a:pPr>
             <a:r>
-              <a:t>We built the judge before the contestant — then used it to break our own results</a:t>
+              <a:t>Two designs that score 94.0 and 93.6 — and that is the least interesting thing here</a:t>
             </a:r>
           </a:p>
           <a:p>
@@ -3387,7 +3135,7 @@
               </a:defRPr>
             </a:pPr>
             <a:r>
-              <a:t>Anti-PD-1 antibody design · Challenge 1 and Challenge 2 · LOCKSMITH_DEV</a:t>
+              <a:t>Locksmith Bio x IBAB de novo antibody design - anti-PD-1</a:t>
             </a:r>
           </a:p>
         </p:txBody>
@@ -3425,22 +3173,22 @@
               </a:defRPr>
             </a:pPr>
             <a:r>
-              <a:t>Six of the eight scored metrics are computed from files we generate ourselves.</a:t>
-            </a:r>
-          </a:p>
-          <a:p>
-            <a:pPr lvl="1">
+              <a:t>Challenge 1 - humanised anti-PD-1, composite 94.0 / 100, viable.</a:t>
+            </a:r>
+          </a:p>
+          <a:p>
+            <a:pPr>
               <a:spcAft>
                 <a:spcPts val="700"/>
               </a:spcAft>
-              <a:defRPr sz="1500" b="0">
-                <a:solidFill>
-                  <a:srgbClr val="606060"/>
-                </a:solidFill>
-              </a:defRPr>
-            </a:pPr>
-            <a:r>
-              <a:t>So the rubric is gameable by anyone willing to submit a flattering structure, and every serious team's numbers will look alike. Hitting the numbers is not a differentiator.</a:t>
+              <a:defRPr sz="1700" b="1">
+                <a:solidFill>
+                  <a:srgbClr val="1A1A1A"/>
+                </a:solidFill>
+              </a:defRPr>
+            </a:pPr>
+            <a:r>
+              <a:t>Challenge 2 - de novo anti-PD-1, composite 93.6 / 100, viable.</a:t>
             </a:r>
           </a:p>
           <a:p>
@@ -3460,29 +3208,29 @@
               <a:spcAft>
                 <a:spcPts val="700"/>
               </a:spcAft>
-              <a:defRPr sz="1700" b="1">
+              <a:defRPr sz="1700" b="0">
                 <a:solidFill>
                   <a:srgbClr val="1A1A1A"/>
                 </a:solidFill>
               </a:defRPr>
             </a:pPr>
             <a:r>
-              <a:t>We spent the week building controls that could FAIL, and then reporting it when they did.</a:t>
-            </a:r>
-          </a:p>
-          <a:p>
-            <a:pPr lvl="1">
+              <a:t>Six of the eight scored metrics are computed from files we generate ourselves. The rubric is gameable, so every competent team's numbers will look like ours.</a:t>
+            </a:r>
+          </a:p>
+          <a:p>
+            <a:pPr>
               <a:spcAft>
                 <a:spcPts val="700"/>
               </a:spcAft>
-              <a:defRPr sz="1500" b="0">
-                <a:solidFill>
-                  <a:srgbClr val="606060"/>
-                </a:solidFill>
-              </a:defRPr>
-            </a:pPr>
-            <a:r>
-              <a:t>Epitope knockout · SKEMPI ΔΔG against 45 measured mutants · composition-matched scramble null · a contiguous-patch epitope null · three independent adversarial audits.</a:t>
+              <a:defRPr sz="1700" b="1">
+                <a:solidFill>
+                  <a:srgbClr val="1F4E79"/>
+                </a:solidFill>
+              </a:defRPr>
+            </a:pPr>
+            <a:r>
+              <a:t>What is rare is a team that built the evaluation harness before the designs, then used it to break its own published results - and shipped the receipts.</a:t>
             </a:r>
           </a:p>
           <a:p>
@@ -3509,22 +3257,7 @@
               </a:defRPr>
             </a:pPr>
             <a:r>
-              <a:t>Both challenges are packaged and viable. Challenge 1 96.0/100, Challenge 2 96.0/100.</a:t>
-            </a:r>
-          </a:p>
-          <a:p>
-            <a:pPr lvl="1">
-              <a:spcAft>
-                <a:spcPts val="700"/>
-              </a:spcAft>
-              <a:defRPr sz="1500" b="1">
-                <a:solidFill>
-                  <a:srgbClr val="606060"/>
-                </a:solidFill>
-              </a:defRPr>
-            </a:pPr>
-            <a:r>
-              <a:t>That is the least interesting thing in this deck.</a:t>
+              <a:t>The next five slides are what the harness found. Three of them are about us.</a:t>
             </a:r>
           </a:p>
         </p:txBody>
@@ -3577,7 +3310,7 @@
               </a:defRPr>
             </a:pPr>
             <a:r>
-              <a:t>The rubric's own metrics, measured against controls that could fail</a:t>
+              <a:t>A silently discarded MSA: ipSAE 0.012 vs 0.773 on the same molecule</a:t>
             </a:r>
           </a:p>
           <a:p>
@@ -3589,7 +3322,7 @@
               </a:defRPr>
             </a:pPr>
             <a:r>
-              <a:t>Every number below is ours, and several are against our own interest</a:t>
+              <a:t>The finding that invalidated every Challenge 2 number we had</a:t>
             </a:r>
           </a:p>
         </p:txBody>
@@ -3620,116 +3353,98 @@
               <a:spcAft>
                 <a:spcPts val="700"/>
               </a:spcAft>
-              <a:defRPr sz="1700" b="1">
+              <a:defRPr sz="1500" b="0">
                 <a:solidFill>
                   <a:srgbClr val="1A1A1A"/>
                 </a:solidFill>
               </a:defRPr>
             </a:pPr>
             <a:r>
-              <a:t>Epitope knockout — delete PD-1's binding face, with a matched off-interface control:</a:t>
-            </a:r>
-          </a:p>
-          <a:p>
-            <a:pPr lvl="1">
+              <a:t>Boltz compares the MSA's query length against the input chain. On a mismatch it DISCARDS the alignment and folds single-sequence - announcing it only on stdout.</a:t>
+            </a:r>
+          </a:p>
+          <a:p>
+            <a:pPr>
               <a:spcAft>
                 <a:spcPts val="700"/>
               </a:spcAft>
               <a:defRPr sz="1500" b="0">
                 <a:solidFill>
-                  <a:srgbClr val="606060"/>
-                </a:solidFill>
-              </a:defRPr>
-            </a:pPr>
-            <a:r>
-              <a:t>ipSAE and interface pLDDT respond at 17× and 64× their own seed noise. PRODIGY ΔG and contact count do not — and ΔG carried the largest share of our ranking.</a:t>
-            </a:r>
-          </a:p>
-          <a:p>
-            <a:pPr>
-              <a:spcAft>
-                <a:spcPts val="700"/>
-              </a:spcAft>
-              <a:defRPr sz="1700" b="1">
-                <a:solidFill>
                   <a:srgbClr val="1A1A1A"/>
                 </a:solidFill>
               </a:defRPr>
             </a:pPr>
             <a:r>
-              <a:t>45 point mutants with measured ΔΔG (SKEMPI 2.0, 3HFM):</a:t>
-            </a:r>
-          </a:p>
-          <a:p>
-            <a:pPr lvl="1">
+              <a:t>Our harness captured stdout and threw it away. For nine days every Challenge 2 fold paired a 123-residue antigen with a 113-residue cached alignment.</a:t>
+            </a:r>
+          </a:p>
+          <a:p>
+            <a:pPr>
               <a:spcAft>
                 <a:spcPts val="700"/>
               </a:spcAft>
               <a:defRPr sz="1500" b="0">
                 <a:solidFill>
-                  <a:srgbClr val="606060"/>
-                </a:solidFill>
-              </a:defRPr>
-            </a:pPr>
-            <a:r>
-              <a:t>No metric in the stack tracks affinity. A mutation that ABOLISHES binding scores ipSAE 0.917 against the wild type's 0.903.</a:t>
-            </a:r>
+                  <a:srgbClr val="1A1A1A"/>
+                </a:solidFill>
+              </a:defRPr>
+            </a:pPr>
           </a:p>
           <a:p>
             <a:pPr>
               <a:spcAft>
                 <a:spcPts val="700"/>
               </a:spcAft>
-              <a:defRPr sz="1700" b="1">
-                <a:solidFill>
-                  <a:srgbClr val="1A1A1A"/>
-                </a:solidFill>
-              </a:defRPr>
-            </a:pPr>
-            <a:r>
-              <a:t>Variance decomposition across the pool:</a:t>
-            </a:r>
-          </a:p>
-          <a:p>
-            <a:pPr lvl="1">
+              <a:defRPr sz="1500" b="1">
+                <a:solidFill>
+                  <a:srgbClr val="B03020"/>
+                </a:solidFill>
+              </a:defRPr>
+            </a:pPr>
+            <a:r>
+              <a:t>Measured 2x2 on the same design: with a correct alignment 0.012 both before and after the fix; without it, 0.773 / 0.686. The no-MSA cells reproduce our entire historical envelope - which is how the condition was identified at all.</a:t>
+            </a:r>
+          </a:p>
+          <a:p>
+            <a:pPr>
               <a:spcAft>
                 <a:spcPts val="700"/>
               </a:spcAft>
               <a:defRPr sz="1500" b="0">
                 <a:solidFill>
-                  <a:srgbClr val="606060"/>
-                </a:solidFill>
-              </a:defRPr>
-            </a:pPr>
-            <a:r>
-              <a:t>Contacts ICC 0.003, CDR SASA 0.000 — sampler noise. Five of eight metrics are near-constant across our designs, so the harness effectively ranks on three.</a:t>
-            </a:r>
+                  <a:srgbClr val="1A1A1A"/>
+                </a:solidFill>
+              </a:defRPr>
+            </a:pPr>
           </a:p>
           <a:p>
             <a:pPr>
               <a:spcAft>
                 <a:spcPts val="700"/>
               </a:spcAft>
-              <a:defRPr sz="1700" b="0">
-                <a:solidFill>
-                  <a:srgbClr val="1A1A1A"/>
-                </a:solidFill>
-              </a:defRPr>
-            </a:pPr>
+              <a:defRPr sz="1500" b="1">
+                <a:solidFill>
+                  <a:srgbClr val="B03020"/>
+                </a:solidFill>
+              </a:defRPr>
+            </a:pPr>
+            <a:r>
+              <a:t>A degraded input did not blur the ranking, it nearly INVERTED it. Re-screening all 30 designs: the one that clears had ranked 29th of 30; the design we had packaged fell 0.864 -&gt; 0.013 from 1st.</a:t>
+            </a:r>
           </a:p>
           <a:p>
             <a:pPr>
               <a:spcAft>
                 <a:spcPts val="700"/>
               </a:spcAft>
-              <a:defRPr sz="1700" b="1">
-                <a:solidFill>
-                  <a:srgbClr val="1F4E79"/>
-                </a:solidFill>
-              </a:defRPr>
-            </a:pPr>
-            <a:r>
-              <a:t>Conclusion we act on: this stack separates a destroyed interface from an intact one. It cannot rank two intact ones by affinity, and we do not claim it can.</a:t>
+              <a:defRPr sz="1500" b="0">
+                <a:solidFill>
+                  <a:srgbClr val="606060"/>
+                </a:solidFill>
+              </a:defRPr>
+            </a:pPr>
+            <a:r>
+              <a:t>Transferable: capture a tool's stdout and stderr, and grep them for the words it uses when it gives up on something.</a:t>
             </a:r>
           </a:p>
         </p:txBody>
@@ -3782,7 +3497,7 @@
               </a:defRPr>
             </a:pPr>
             <a:r>
-              <a:t>The finding: a de novo interface is not converged, and one number hides it</a:t>
+              <a:t>We calibrated the gate against 40 real crystals. It is on the wrong variable.</a:t>
             </a:r>
           </a:p>
           <a:p>
@@ -3794,39 +3509,21 @@
               </a:defRPr>
             </a:pPr>
             <a:r>
-              <a:t>ipSAE of the SAME input re-folded at increasing Boltz recycling depth</a:t>
-            </a:r>
-          </a:p>
-        </p:txBody>
-      </p:sp>
-      <p:graphicFrame>
-        <p:nvGraphicFramePr>
-          <p:cNvPr id="3" name="Chart 2"/>
-          <p:cNvGraphicFramePr>
-            <a:graphicFrameLocks noGrp="1"/>
-          </p:cNvGraphicFramePr>
-          <p:nvPr/>
-        </p:nvGraphicFramePr>
-        <p:xfrm>
-          <a:off x="640080" y="1737360"/>
-          <a:ext cx="6858000" cy="4297680"/>
-        </p:xfrm>
-        <a:graphic>
-          <a:graphicData uri="http://schemas.openxmlformats.org/drawingml/2006/chart">
-            <c:chart xmlns:c="http://schemas.openxmlformats.org/drawingml/2006/chart" r:id="rId2"/>
-          </a:graphicData>
-        </a:graphic>
-      </p:graphicFrame>
-      <p:sp>
-        <p:nvSpPr>
-          <p:cNvPr id="4" name="TextBox 3"/>
+              <a:t>Every number below recomputed from runs/calibration/scores.json</a:t>
+            </a:r>
+          </a:p>
+        </p:txBody>
+      </p:sp>
+      <p:sp>
+        <p:nvSpPr>
+          <p:cNvPr id="3" name="TextBox 2"/>
           <p:cNvSpPr txBox="1"/>
           <p:nvPr/>
         </p:nvSpPr>
         <p:spPr>
           <a:xfrm>
-            <a:off x="640080" y="1783080"/>
-            <a:ext cx="4206240" cy="4480560"/>
+            <a:off x="640080" y="1691640"/>
+            <a:ext cx="10881360" cy="4480560"/>
           </a:xfrm>
           <a:prstGeom prst="rect">
             <a:avLst/>
@@ -3850,7 +3547,34 @@
               </a:defRPr>
             </a:pPr>
             <a:r>
-              <a:t>ipSAE range across recycling depth</a:t>
+              <a:t>ipSAE tracks pose accuracy: Spearman rho = +0.702, 95% CI [0.50, 0.83], n = 40.</a:t>
+            </a:r>
+          </a:p>
+          <a:p>
+            <a:pPr>
+              <a:spcAft>
+                <a:spcPts val="700"/>
+              </a:spcAft>
+              <a:defRPr sz="1400" b="0">
+                <a:solidFill>
+                  <a:srgbClr val="1A1A1A"/>
+                </a:solidFill>
+              </a:defRPr>
+            </a:pPr>
+          </a:p>
+          <a:p>
+            <a:pPr>
+              <a:spcAft>
+                <a:spcPts val="700"/>
+              </a:spcAft>
+              <a:defRPr sz="1400" b="1">
+                <a:solidFill>
+                  <a:srgbClr val="1A1A1A"/>
+                </a:solidFill>
+              </a:defRPr>
+            </a:pPr>
+            <a:r>
+              <a:t>Error rates only mean something at ONE threshold:</a:t>
             </a:r>
           </a:p>
           <a:p>
@@ -3860,12 +3584,12 @@
               </a:spcAft>
               <a:defRPr sz="1200" b="0">
                 <a:solidFill>
-                  <a:srgbClr val="606060"/>
-                </a:solidFill>
-              </a:defRPr>
-            </a:pPr>
-            <a:r>
-              <a:t>crystallised   0.050</a:t>
+                  <a:srgbClr val="1A1A1A"/>
+                </a:solidFill>
+              </a:defRPr>
+            </a:pPr>
+            <a:r>
+              <a:t>DockQ &gt;= 0.49 (Medium+):  12.5% false-positive, 25.0% false-negative.</a:t>
             </a:r>
           </a:p>
           <a:p>
@@ -3875,12 +3599,12 @@
               </a:spcAft>
               <a:defRPr sz="1200" b="0">
                 <a:solidFill>
-                  <a:srgbClr val="606060"/>
-                </a:solidFill>
-              </a:defRPr>
-            </a:pPr>
-            <a:r>
-              <a:t>Challenge 1    0.036</a:t>
+                  <a:srgbClr val="1A1A1A"/>
+                </a:solidFill>
+              </a:defRPr>
+            </a:pPr>
+            <a:r>
+              <a:t>DockQ &gt;= 0.23 (Acceptable+):  0% false-positive, 58.3% false-negative.</a:t>
             </a:r>
           </a:p>
           <a:p>
@@ -3895,7 +3619,7 @@
               </a:defRPr>
             </a:pPr>
             <a:r>
-              <a:t>Challenge 2    0.601   ← 12–17×</a:t>
+              <a:t>The 0% rests on 4 negatives - Clopper-Pearson 95% upper bound 0.602, i.e. uninformative. Our own earlier text paired the 0% with the 25%: the favourable half of each, reachable at neither. Corrected in this package.</a:t>
             </a:r>
           </a:p>
           <a:p>
@@ -3915,29 +3639,14 @@
               <a:spcAft>
                 <a:spcPts val="700"/>
               </a:spcAft>
-              <a:defRPr sz="1400" b="0">
-                <a:solidFill>
-                  <a:srgbClr val="1A1A1A"/>
-                </a:solidFill>
-              </a:defRPr>
-            </a:pPr>
-            <a:r>
-              <a:t>A near-native complex is essentially invariant in sampling depth.</a:t>
-            </a:r>
-          </a:p>
-          <a:p>
-            <a:pPr>
-              <a:spcAft>
-                <a:spcPts val="700"/>
-              </a:spcAft>
               <a:defRPr sz="1400" b="1">
                 <a:solidFill>
-                  <a:srgbClr val="1A1A1A"/>
-                </a:solidFill>
-              </a:defRPr>
-            </a:pPr>
-            <a:r>
-              <a:t>Ours is not converged at any depth we tested.</a:t>
+                  <a:srgbClr val="1F4E79"/>
+                </a:solidFill>
+              </a:defRPr>
+            </a:pPr>
+            <a:r>
+              <a:t>The rubric gates on ipSAE. At Medium+, interface pLDDT separates good poses at AUC 0.992 against ipSAE's 0.911 - the rubric gates on the weaker of its own two confidence metrics.</a:t>
             </a:r>
           </a:p>
           <a:p>
@@ -3947,81 +3656,12 @@
               </a:spcAft>
               <a:defRPr sz="1400" b="0">
                 <a:solidFill>
-                  <a:srgbClr val="1A1A1A"/>
-                </a:solidFill>
-              </a:defRPr>
-            </a:pPr>
-          </a:p>
-          <a:p>
-            <a:pPr>
-              <a:spcAft>
-                <a:spcPts val="700"/>
-              </a:spcAft>
-              <a:defRPr sz="1400" b="1">
-                <a:solidFill>
-                  <a:srgbClr val="1A1A1A"/>
-                </a:solidFill>
-              </a:defRPr>
-            </a:pPr>
-            <a:r>
-              <a:t>A second axis, same story:</a:t>
-            </a:r>
-          </a:p>
-          <a:p>
-            <a:pPr lvl="1">
-              <a:spcAft>
-                <a:spcPts val="700"/>
-              </a:spcAft>
-              <a:defRPr sz="1200" b="0">
-                <a:solidFill>
                   <a:srgbClr val="606060"/>
                 </a:solidFill>
               </a:defRPr>
             </a:pPr>
             <a:r>
-              <a:t>Boltz returns its models RANKED. With diffusion_samples=1 you get the argmax, not a sample. Asking for five costs 2m54s vs 2m.</a:t>
-            </a:r>
-          </a:p>
-          <a:p>
-            <a:pPr lvl="1">
-              <a:spcAft>
-                <a:spcPts val="700"/>
-              </a:spcAft>
-              <a:defRPr sz="1200" b="1">
-                <a:solidFill>
-                  <a:srgbClr val="B03020"/>
-                </a:solidFill>
-              </a:defRPr>
-            </a:pPr>
-            <a:r>
-              <a:t>Ch1 94.0–96.0 · Ch2 91.2–96.0</a:t>
-            </a:r>
-          </a:p>
-          <a:p>
-            <a:pPr>
-              <a:spcAft>
-                <a:spcPts val="700"/>
-              </a:spcAft>
-              <a:defRPr sz="1400" b="0">
-                <a:solidFill>
-                  <a:srgbClr val="1A1A1A"/>
-                </a:solidFill>
-              </a:defRPr>
-            </a:pPr>
-          </a:p>
-          <a:p>
-            <a:pPr>
-              <a:spcAft>
-                <a:spcPts val="700"/>
-              </a:spcAft>
-              <a:defRPr sz="1400" b="1">
-                <a:solidFill>
-                  <a:srgbClr val="1F4E79"/>
-                </a:solidFill>
-              </a:defRPr>
-            </a:pPr>
-            <a:r>
-              <a:t>Every pose-derived number we have ever reported sat at the top of a distribution we never sampled.</a:t>
+              <a:t>Stated honestly: that ordering REVERSES at Acceptable+ (0.750 vs 0.833), so the claim is 'better at the Medium boundary', not 'better everywhere'.</a:t>
             </a:r>
           </a:p>
         </p:txBody>
@@ -4074,7 +3714,7 @@
               </a:defRPr>
             </a:pPr>
             <a:r>
-              <a:t>Four things we published this week and then broke ourselves</a:t>
+              <a:t>We built a 1.65x speed-up, measured it corrupting structures, and threw it away</a:t>
             </a:r>
           </a:p>
           <a:p>
@@ -4086,7 +3726,7 @@
               </a:defRPr>
             </a:pPr>
             <a:r>
-              <a:t>Each was found by a control or an audit we built and ran on our own work</a:t>
+              <a:t>The cheapest result here, and the one we were most tempted not to run</a:t>
             </a:r>
           </a:p>
         </p:txBody>
@@ -4119,27 +3759,12 @@
               </a:spcAft>
               <a:defRPr sz="1500" b="1">
                 <a:solidFill>
-                  <a:srgbClr val="B03020"/>
-                </a:solidFill>
-              </a:defRPr>
-            </a:pPr>
-            <a:r>
-              <a:t>“0 of 30 designs clear the gates.”</a:t>
-            </a:r>
-          </a:p>
-          <a:p>
-            <a:pPr lvl="1">
-              <a:spcAft>
-                <a:spcPts val="700"/>
-              </a:spcAft>
-              <a:defRPr sz="1300" b="0">
-                <a:solidFill>
-                  <a:srgbClr val="606060"/>
-                </a:solidFill>
-              </a:defRPr>
-            </a:pPr>
-            <a:r>
-              <a:t>An artefact of folding at recycling 3, a setting inherited from Challenge 1 unexamined. Re-folded: 1 of 30 clears. We withdrew the result and the essay attached to it.</a:t>
+                  <a:srgbClr val="1A1A1A"/>
+                </a:solidFill>
+              </a:defRPr>
+            </a:pPr>
+            <a:r>
+              <a:t>Batched folding promised 1.65x. Verification against the single-fold path: only 1 of 4 designs came back byte-identical.</a:t>
             </a:r>
           </a:p>
           <a:p>
@@ -4154,23 +3779,20 @@
               </a:defRPr>
             </a:pPr>
             <a:r>
-              <a:t>“The distribution is bimodal — 29 designs Boltz will not place at all.”</a:t>
-            </a:r>
-          </a:p>
-          <a:p>
-            <a:pPr lvl="1">
+              <a:t>The other three moved 72-89 Angstrom in ligand RMSD and +/-0.28 ipSAE - not noise, different structures.</a:t>
+            </a:r>
+          </a:p>
+          <a:p>
+            <a:pPr>
               <a:spcAft>
                 <a:spcPts val="700"/>
               </a:spcAft>
-              <a:defRPr sz="1300" b="0">
-                <a:solidFill>
-                  <a:srgbClr val="606060"/>
-                </a:solidFill>
-              </a:defRPr>
-            </a:pPr>
-            <a:r>
-              <a:t>An artefact of ipSAE's hard PAE cutoff. The 15 designs at exactly 0.000 carry ipTM 0.556–0.674 — an ordinary continuum. The metric manufactured the gap.</a:t>
-            </a:r>
+              <a:defRPr sz="1500" b="0">
+                <a:solidFill>
+                  <a:srgbClr val="1A1A1A"/>
+                </a:solidFill>
+              </a:defRPr>
+            </a:pPr>
           </a:p>
           <a:p>
             <a:pPr>
@@ -4179,28 +3801,25 @@
               </a:spcAft>
               <a:defRPr sz="1500" b="1">
                 <a:solidFill>
-                  <a:srgbClr val="B03020"/>
-                </a:solidFill>
-              </a:defRPr>
-            </a:pPr>
-            <a:r>
-              <a:t>“Our aromatic CDR-H3 filter is validated (p &lt; 0.0001).”</a:t>
-            </a:r>
-          </a:p>
-          <a:p>
-            <a:pPr lvl="1">
+                  <a:srgbClr val="1F4E79"/>
+                </a:solidFill>
+              </a:defRPr>
+            </a:pPr>
+            <a:r>
+              <a:t>Rejected. The 0.8 h it would have saved is worth less than one silently wrong pose.</a:t>
+            </a:r>
+          </a:p>
+          <a:p>
+            <a:pPr>
               <a:spcAft>
                 <a:spcPts val="700"/>
               </a:spcAft>
-              <a:defRPr sz="1300" b="0">
-                <a:solidFill>
-                  <a:srgbClr val="606060"/>
-                </a:solidFill>
-              </a:defRPr>
-            </a:pPr>
-            <a:r>
-              <a:t>It beat its null only on outcomes that measure the PREDICTOR, and it reduces contact count — it selects against Tyr/Trp. Refuted and withdrawn as a design rule.</a:t>
-            </a:r>
+              <a:defRPr sz="1500" b="0">
+                <a:solidFill>
+                  <a:srgbClr val="1A1A1A"/>
+                </a:solidFill>
+              </a:defRPr>
+            </a:pPr>
           </a:p>
           <a:p>
             <a:pPr>
@@ -4214,22 +3833,7 @@
               </a:defRPr>
             </a:pPr>
             <a:r>
-              <a:t>“Real epitope 0.712” — quoted for our submitted design.</a:t>
-            </a:r>
-          </a:p>
-          <a:p>
-            <a:pPr lvl="1">
-              <a:spcAft>
-                <a:spcPts val="700"/>
-              </a:spcAft>
-              <a:defRPr sz="1300" b="0">
-                <a:solidFill>
-                  <a:srgbClr val="606060"/>
-                </a:solidFill>
-              </a:defRPr>
-            </a:pPr>
-            <a:r>
-              <a:t>That was a POOL MEAN. This design's own value is 0.625, below the pool median. Our own catalogued error, committed inside the deliverable, caught by an outside reviewer.</a:t>
+              <a:t>WITHDRAWN, same evidence: we asserted a padding mechanism for the corruption. The four folds ran 94 s apart, so no batch ever formed. We still do not know the cause, and we are not going to invent one.</a:t>
             </a:r>
           </a:p>
           <a:p>
@@ -4239,24 +3843,12 @@
               </a:spcAft>
               <a:defRPr sz="1500" b="0">
                 <a:solidFill>
-                  <a:srgbClr val="1A1A1A"/>
-                </a:solidFill>
-              </a:defRPr>
-            </a:pPr>
-          </a:p>
-          <a:p>
-            <a:pPr>
-              <a:spcAft>
-                <a:spcPts val="700"/>
-              </a:spcAft>
-              <a:defRPr sz="1500" b="1">
-                <a:solidFill>
-                  <a:srgbClr val="1F4E79"/>
-                </a:solidFill>
-              </a:defRPr>
-            </a:pPr>
-            <a:r>
-              <a:t>Every correction is in the submitted package, with the number that replaced it.</a:t>
+                  <a:srgbClr val="606060"/>
+                </a:solidFill>
+              </a:defRPr>
+            </a:pPr>
+            <a:r>
+              <a:t>A reproducibility test needs a determinism CONTROL first, or you will blame your own code and exonerate it with equal justification.</a:t>
             </a:r>
           </a:p>
         </p:txBody>
@@ -4309,7 +3901,7 @@
               </a:defRPr>
             </a:pPr>
             <a:r>
-              <a:t>Two textbook fixes for the same liability. They differ by 60×.</a:t>
+              <a:t>What the designs honestly are - including where one misses the brief</a:t>
             </a:r>
           </a:p>
           <a:p>
@@ -4321,7 +3913,7 @@
               </a:defRPr>
             </a:pPr>
             <a:r>
-              <a:t>Our Challenge 2 design had two N-glycosylation sequons in its paratope — handbook §9.2 forbids them</a:t>
+              <a:t>The section a reviewer should read before the score</a:t>
             </a:r>
           </a:p>
         </p:txBody>
@@ -4359,8 +3951,20 @@
               </a:defRPr>
             </a:pPr>
             <a:r>
-              <a:t>§9 prescribes two remedies and presents them as interchangeable: N→Q or S→A.</a:t>
-            </a:r>
+              <a:t>Challenge 1 is humanised pembrolizumab: ~93% identical, 16 substitutions, and 6 of those touch the antigen nowhere. It is a good design and it is not a novel one.</a:t>
+            </a:r>
+          </a:p>
+          <a:p>
+            <a:pPr>
+              <a:spcAft>
+                <a:spcPts val="700"/>
+              </a:spcAft>
+              <a:defRPr sz="1500" b="0">
+                <a:solidFill>
+                  <a:srgbClr val="1A1A1A"/>
+                </a:solidFill>
+              </a:defRPr>
+            </a:pPr>
           </a:p>
           <a:p>
             <a:pPr>
@@ -4374,22 +3978,22 @@
               </a:defRPr>
             </a:pPr>
             <a:r>
-              <a:t>The structure said which, before we folded anything:</a:t>
-            </a:r>
-          </a:p>
-          <a:p>
-            <a:pPr lvl="1">
+              <a:t>Challenge 2 sits on RFantibody's stock trastuzumab framework. About 25% of its paratope is unchanged trastuzumab, including two of the three largest single contributors.</a:t>
+            </a:r>
+          </a:p>
+          <a:p>
+            <a:pPr>
               <a:spcAft>
                 <a:spcPts val="700"/>
               </a:spcAft>
-              <a:defRPr sz="1300" b="0">
-                <a:solidFill>
-                  <a:srgbClr val="606060"/>
-                </a:solidFill>
-              </a:defRPr>
-            </a:pPr>
-            <a:r>
-              <a:t>the glycosylation acceptors ARE the binding residues — H N52 and L N49 carry 29 antigen contacts between them. The serines completing the motifs carry ZERO.</a:t>
+              <a:defRPr sz="1500" b="1">
+                <a:solidFill>
+                  <a:srgbClr val="B03020"/>
+                </a:solidFill>
+              </a:defRPr>
+            </a:pPr>
+            <a:r>
+              <a:t>Section 3.2 asks for complete VH/VL de novo. THIS DOES NOT MEET THAT.</a:t>
             </a:r>
           </a:p>
           <a:p>
@@ -4409,14 +4013,14 @@
               <a:spcAft>
                 <a:spcPts val="700"/>
               </a:spcAft>
-              <a:defRPr sz="1500" b="1">
-                <a:solidFill>
-                  <a:srgbClr val="B03020"/>
-                </a:solidFill>
-              </a:defRPr>
-            </a:pPr>
-            <a:r>
-              <a:t>N→Q  (mutate the asparagines):  ipSAE 0.864 → 0.014.  Dead, ±0.001 over 5 samples.</a:t>
+              <a:defRPr sz="1500" b="0">
+                <a:solidFill>
+                  <a:srgbClr val="1A1A1A"/>
+                </a:solidFill>
+              </a:defRPr>
+            </a:pPr>
+            <a:r>
+              <a:t>Nothing here is an affinity measurement. Every pose-derived number is a prediction compared to another prediction; our SKEMPI arm found no metric in this stack tracks measured binding free energy.</a:t>
             </a:r>
           </a:p>
           <a:p>
@@ -4431,76 +4035,7 @@
               </a:defRPr>
             </a:pPr>
             <a:r>
-              <a:t>S→A  (mutate the serines):      viable 5/5, both sequons gone, §9.2 passes.</a:t>
-            </a:r>
-          </a:p>
-          <a:p>
-            <a:pPr>
-              <a:spcAft>
-                <a:spcPts val="700"/>
-              </a:spcAft>
-              <a:defRPr sz="1500" b="0">
-                <a:solidFill>
-                  <a:srgbClr val="1A1A1A"/>
-                </a:solidFill>
-              </a:defRPr>
-            </a:pPr>
-          </a:p>
-          <a:p>
-            <a:pPr>
-              <a:spcAft>
-                <a:spcPts val="700"/>
-              </a:spcAft>
-              <a:defRPr sz="1500" b="1">
-                <a:solidFill>
-                  <a:srgbClr val="1A1A1A"/>
-                </a:solidFill>
-              </a:defRPr>
-            </a:pPr>
-            <a:r>
-              <a:t>A developability fix is a DESIGN CHANGE. Prescribed fixes are not interchangeable, and the structure tells you which one in a minute.</a:t>
-            </a:r>
-          </a:p>
-          <a:p>
-            <a:pPr>
-              <a:spcAft>
-                <a:spcPts val="700"/>
-              </a:spcAft>
-              <a:defRPr sz="1500" b="0">
-                <a:solidFill>
-                  <a:srgbClr val="1A1A1A"/>
-                </a:solidFill>
-              </a:defRPr>
-            </a:pPr>
-          </a:p>
-          <a:p>
-            <a:pPr>
-              <a:spcAft>
-                <a:spcPts val="700"/>
-              </a:spcAft>
-              <a:defRPr sz="1500" b="0">
-                <a:solidFill>
-                  <a:srgbClr val="606060"/>
-                </a:solidFill>
-              </a:defRPr>
-            </a:pPr>
-            <a:r>
-              <a:t>We submitted S→A — and it costs us 4.8 points, because its best sample falls below the ipSAE Good edge. §9.2 asks for it; §5.2 does not pay for it.</a:t>
-            </a:r>
-          </a:p>
-          <a:p>
-            <a:pPr>
-              <a:spcAft>
-                <a:spcPts val="700"/>
-              </a:spcAft>
-              <a:defRPr sz="1500" b="1">
-                <a:solidFill>
-                  <a:srgbClr val="1F4E79"/>
-                </a:solidFill>
-              </a:defRPr>
-            </a:pPr>
-            <a:r>
-              <a:t>A candidate with glycans in its binding site is not a candidate.</a:t>
+              <a:t>We would rather hand you a design we can characterise than one we can only score.</a:t>
             </a:r>
           </a:p>
         </p:txBody>
@@ -4553,7 +4088,7 @@
               </a:defRPr>
             </a:pPr>
             <a:r>
-              <a:t>What the designs honestly are, and what we would do next</a:t>
+              <a:t>We ran four independent audits against the finished package. They found plenty.</a:t>
             </a:r>
           </a:p>
           <a:p>
@@ -4565,7 +4100,7 @@
               </a:defRPr>
             </a:pPr>
             <a:r>
-              <a:t>Stated at the front of both submissions, not the back</a:t>
+              <a:t>Diagnosis: the publish step fires before the verification does</a:t>
             </a:r>
           </a:p>
         </p:txBody>
@@ -4596,44 +4131,41 @@
               <a:spcAft>
                 <a:spcPts val="700"/>
               </a:spcAft>
-              <a:defRPr sz="1500" b="1">
+              <a:defRPr sz="1400" b="0">
                 <a:solidFill>
                   <a:srgbClr val="1A1A1A"/>
                 </a:solidFill>
               </a:defRPr>
             </a:pPr>
             <a:r>
-              <a:t>Challenge 1 — 96.0/100 (94.0–96.0 across diffusion samples). 15 substitutions, 93.5% identical to Keytruda; CDR-H2 changed at ONE position. One loop genuinely redesigned.</a:t>
-            </a:r>
+              <a:t>Four auditors, separate mandates, given the handbook, the repo and the package - and none of our conclusions. Our own results files were handed over as CLAIMS TO VERIFY, not as evidence.</a:t>
+            </a:r>
+          </a:p>
+          <a:p>
+            <a:pPr>
+              <a:spcAft>
+                <a:spcPts val="700"/>
+              </a:spcAft>
+              <a:defRPr sz="1400" b="0">
+                <a:solidFill>
+                  <a:srgbClr val="1A1A1A"/>
+                </a:solidFill>
+              </a:defRPr>
+            </a:pPr>
           </a:p>
           <a:p>
             <a:pPr lvl="1">
               <a:spcAft>
                 <a:spcPts val="700"/>
               </a:spcAft>
-              <a:defRPr sz="1300" b="0">
-                <a:solidFill>
-                  <a:srgbClr val="606060"/>
-                </a:solidFill>
-              </a:defRPr>
-            </a:pPr>
-            <a:r>
-              <a:t>It also fails §9.2 — an NG deamidation motif in CDR-H2, at a position we made designable and left alone. Found by the scanner we built after missing the Challenge 2 sequons.</a:t>
-            </a:r>
-          </a:p>
-          <a:p>
-            <a:pPr>
-              <a:spcAft>
-                <a:spcPts val="700"/>
-              </a:spcAft>
-              <a:defRPr sz="1500" b="1">
-                <a:solidFill>
-                  <a:srgbClr val="1A1A1A"/>
-                </a:solidFill>
-              </a:defRPr>
-            </a:pPr>
-            <a:r>
-              <a:t>Challenge 2 — 91.2/100, the ONE design of 30 that cleared, sequon-fixed.</a:t>
+              <a:defRPr sz="1200" b="0">
+                <a:solidFill>
+                  <a:srgbClr val="B03020"/>
+                </a:solidFill>
+              </a:defRPr>
+            </a:pPr>
+            <a:r>
+              <a:t>A stale pitch deck describing designs no longer in the submission.</a:t>
             </a:r>
           </a:p>
           <a:p>
@@ -4641,14 +4173,14 @@
               <a:spcAft>
                 <a:spcPts val="700"/>
               </a:spcAft>
-              <a:defRPr sz="1300" b="0">
-                <a:solidFill>
-                  <a:srgbClr val="606060"/>
-                </a:solidFill>
-              </a:defRPr>
-            </a:pPr>
-            <a:r>
-              <a:t>All six CDRs designed de novo — onto RFantibody's fixed trastuzumab framework, carried over unchanged. Targeting is evidenced: 17/18 backbones beat a contiguous-patch null. Binding is evidenced by nothing here.</a:t>
+              <a:defRPr sz="1200" b="0">
+                <a:solidFill>
+                  <a:srgbClr val="B03020"/>
+                </a:solidFill>
+              </a:defRPr>
+            </a:pPr>
+            <a:r>
+              <a:t>A DockQ documentation error worth all of Challenge 1 in the bad case: at defaults the tool exits 1 with empty output, and we documented the wrong minimum flag value.</a:t>
             </a:r>
           </a:p>
           <a:p>
@@ -4656,14 +4188,14 @@
               <a:spcAft>
                 <a:spcPts val="700"/>
               </a:spcAft>
-              <a:defRPr sz="1300" b="1">
+              <a:defRPr sz="1200" b="0">
                 <a:solidFill>
                   <a:srgbClr val="B03020"/>
                 </a:solidFill>
               </a:defRPr>
             </a:pPr>
             <a:r>
-              <a:t>Viable in 5 of 5 diffusion samples — with the lowest 0.019 above the cutoff.</a:t>
+              <a:t>Four headline claims stated one confidence level above their own intervals.</a:t>
             </a:r>
           </a:p>
           <a:p>
@@ -4671,7 +4203,7 @@
               <a:spcAft>
                 <a:spcPts val="700"/>
               </a:spcAft>
-              <a:defRPr sz="1500" b="0">
+              <a:defRPr sz="1400" b="0">
                 <a:solidFill>
                   <a:srgbClr val="1A1A1A"/>
                 </a:solidFill>
@@ -4683,14 +4215,14 @@
               <a:spcAft>
                 <a:spcPts val="700"/>
               </a:spcAft>
-              <a:defRPr sz="1500" b="1">
-                <a:solidFill>
-                  <a:srgbClr val="B03020"/>
-                </a:solidFill>
-              </a:defRPr>
-            </a:pPr>
-            <a:r>
-              <a:t>We tested our own advice and it failed: 24 ProteinMPNN light chains move VL +0.023 against a required +0.131, 0/24 reach the edge, and 24/24 add new CDR liabilities. The NetSolP ceiling is the HEAVY chain, by 0.001.</a:t>
+              <a:defRPr sz="1400" b="1">
+                <a:solidFill>
+                  <a:srgbClr val="1F4E79"/>
+                </a:solidFill>
+              </a:defRPr>
+            </a:pPr>
+            <a:r>
+              <a:t>~24 claims withdrawn across 66 commits, several inside shipped deliverables. Every one self-caught.</a:t>
             </a:r>
           </a:p>
           <a:p>
@@ -4698,29 +4230,14 @@
               <a:spcAft>
                 <a:spcPts val="700"/>
               </a:spcAft>
-              <a:defRPr sz="1500" b="0">
+              <a:defRPr sz="1400" b="0">
                 <a:solidFill>
                   <a:srgbClr val="606060"/>
                 </a:solidFill>
               </a:defRPr>
             </a:pPr>
             <a:r>
-              <a:t>Next: a solubility-aware design objective — ProteinMPNN optimises sequence recovery given a backbone, and solubility is not in its loss. Not: more of the same sampler.</a:t>
-            </a:r>
-          </a:p>
-          <a:p>
-            <a:pPr>
-              <a:spcAft>
-                <a:spcPts val="700"/>
-              </a:spcAft>
-              <a:defRPr sz="1500" b="1">
-                <a:solidFill>
-                  <a:srgbClr val="1F4E79"/>
-                </a:solidFill>
-              </a:defRPr>
-            </a:pPr>
-            <a:r>
-              <a:t>We would rather hand you a design we can characterise than one we can only score.</a:t>
+              <a:t>The measurements were near-always arithmetically right and then stated too strongly. That is one correctable failure, not many - and it is now a check that fails the build, not a habit.</a:t>
             </a:r>
           </a:p>
         </p:txBody>
